--- a/documents/proposals/sanshoku-bunki_proposal.pptx
+++ b/documents/proposals/sanshoku-bunki_proposal.pptx
@@ -2,18 +2,18 @@
 <file path=ppt/presentation.xml><?xml version="1.0" encoding="utf-8"?>
 <p:presentation xmlns:p="http://schemas.openxmlformats.org/presentationml/2006/main">
   <p:sldMasterIdLst>
-    <p:sldMasterId xmlns:r="http://schemas.openxmlformats.org/officeDocument/2006/relationships" id="2147483648" r:id="R1f063bc5869c484c"/>
+    <p:sldMasterId xmlns:r="http://schemas.openxmlformats.org/officeDocument/2006/relationships" id="2147483648" r:id="R1bd268c665094b2f"/>
   </p:sldMasterIdLst>
   <p:notesMasterIdLst>
-    <p:notesMasterId xmlns:r="http://schemas.openxmlformats.org/officeDocument/2006/relationships" r:id="Rcb51521d59354df7"/>
+    <p:notesMasterId xmlns:r="http://schemas.openxmlformats.org/officeDocument/2006/relationships" r:id="R4d66ee087bb74ddd"/>
   </p:notesMasterIdLst>
   <p:sldIdLst>
-    <p:sldId xmlns:r="http://schemas.openxmlformats.org/officeDocument/2006/relationships" id="256" r:id="R0f6b162043b24a33"/>
-    <p:sldId xmlns:r="http://schemas.openxmlformats.org/officeDocument/2006/relationships" id="257" r:id="R022c20c5461d4a2a"/>
-    <p:sldId xmlns:r="http://schemas.openxmlformats.org/officeDocument/2006/relationships" id="258" r:id="Rf1db2413343842c6"/>
-    <p:sldId xmlns:r="http://schemas.openxmlformats.org/officeDocument/2006/relationships" id="259" r:id="R8c615b8714794410"/>
-    <p:sldId xmlns:r="http://schemas.openxmlformats.org/officeDocument/2006/relationships" id="260" r:id="R803dc52c31ae4635"/>
-    <p:sldId xmlns:r="http://schemas.openxmlformats.org/officeDocument/2006/relationships" id="261" r:id="Rc0deaa1c65a34220"/>
+    <p:sldId xmlns:r="http://schemas.openxmlformats.org/officeDocument/2006/relationships" id="256" r:id="Rce66f005afa94ffe"/>
+    <p:sldId xmlns:r="http://schemas.openxmlformats.org/officeDocument/2006/relationships" id="257" r:id="R119a1bbbe4e8441b"/>
+    <p:sldId xmlns:r="http://schemas.openxmlformats.org/officeDocument/2006/relationships" id="258" r:id="Rc0fa10ef08ab4461"/>
+    <p:sldId xmlns:r="http://schemas.openxmlformats.org/officeDocument/2006/relationships" id="259" r:id="R7c220f1b9b914fe8"/>
+    <p:sldId xmlns:r="http://schemas.openxmlformats.org/officeDocument/2006/relationships" id="260" r:id="R495573a036954bab"/>
+    <p:sldId xmlns:r="http://schemas.openxmlformats.org/officeDocument/2006/relationships" id="261" r:id="R3a0709c6e3de4e6f"/>
   </p:sldIdLst>
   <p:sldSz cx="12192000" cy="6858000"/>
   <p:notesSz cx="6858000" cy="9144000"/>
@@ -994,7 +994,7 @@
           <p:cNvPr id="3" name="Title">
             <a:extLst xmlns:a="http://schemas.openxmlformats.org/drawingml/2006/main">
               <a:ext uri="{FF2B5EF4-FFF2-40B4-BE49-F238E27FC236}">
-                <a16:creationId xmlns:a16="http://schemas.microsoft.com/office/drawing/2014/main" id="{2F529307-521E-4092-AB84-6ADF4A55A35A}"/>
+                <a16:creationId xmlns:a16="http://schemas.microsoft.com/office/drawing/2014/main" id="{F84CC125-D93D-4671-87A9-8F92029E3D89}"/>
               </a:ext>
             </a:extLst>
           </p:cNvPr>
@@ -1223,7 +1223,7 @@
           <p:cNvPr id="2" name="Subtitle">
             <a:extLst xmlns:a="http://schemas.openxmlformats.org/drawingml/2006/main">
               <a:ext uri="{FF2B5EF4-FFF2-40B4-BE49-F238E27FC236}">
-                <a16:creationId xmlns:a16="http://schemas.microsoft.com/office/drawing/2014/main" id="{296007BA-0670-472F-B896-C16E9C8FAF91}"/>
+                <a16:creationId xmlns:a16="http://schemas.microsoft.com/office/drawing/2014/main" id="{B842D52D-5A96-45C1-972C-BE2E9A908B54}"/>
               </a:ext>
             </a:extLst>
           </p:cNvPr>
@@ -1469,7 +1469,7 @@
           <p:cNvPr id="2" name="Section title">
             <a:extLst xmlns:a="http://schemas.openxmlformats.org/drawingml/2006/main">
               <a:ext uri="{FF2B5EF4-FFF2-40B4-BE49-F238E27FC236}">
-                <a16:creationId xmlns:a16="http://schemas.microsoft.com/office/drawing/2014/main" id="{BC5133A6-F3AC-41B1-953C-8C2FA12356D1}"/>
+                <a16:creationId xmlns:a16="http://schemas.microsoft.com/office/drawing/2014/main" id="{01910D6C-45BF-49ED-9097-6B4E460F290B}"/>
               </a:ext>
             </a:extLst>
           </p:cNvPr>
@@ -1715,7 +1715,7 @@
           <p:cNvPr id="3" name="Title">
             <a:extLst xmlns:a="http://schemas.openxmlformats.org/drawingml/2006/main">
               <a:ext uri="{FF2B5EF4-FFF2-40B4-BE49-F238E27FC236}">
-                <a16:creationId xmlns:a16="http://schemas.microsoft.com/office/drawing/2014/main" id="{C9DF3C40-5A0D-4D30-998C-CA1F6F7BA993}"/>
+                <a16:creationId xmlns:a16="http://schemas.microsoft.com/office/drawing/2014/main" id="{20D69810-6A71-460F-8D8C-F36D4FF9191F}"/>
               </a:ext>
             </a:extLst>
           </p:cNvPr>
@@ -1944,7 +1944,7 @@
           <p:cNvPr id="2" name="Body">
             <a:extLst xmlns:a="http://schemas.openxmlformats.org/drawingml/2006/main">
               <a:ext uri="{FF2B5EF4-FFF2-40B4-BE49-F238E27FC236}">
-                <a16:creationId xmlns:a16="http://schemas.microsoft.com/office/drawing/2014/main" id="{A5D29F56-C493-470F-8F18-CDF37B411C31}"/>
+                <a16:creationId xmlns:a16="http://schemas.microsoft.com/office/drawing/2014/main" id="{ACBCD2FB-B021-4A82-A4E5-E95B9961515E}"/>
               </a:ext>
             </a:extLst>
           </p:cNvPr>
@@ -2190,7 +2190,7 @@
           <p:cNvPr id="4" name="Title">
             <a:extLst xmlns:a="http://schemas.openxmlformats.org/drawingml/2006/main">
               <a:ext uri="{FF2B5EF4-FFF2-40B4-BE49-F238E27FC236}">
-                <a16:creationId xmlns:a16="http://schemas.microsoft.com/office/drawing/2014/main" id="{A0F49030-2D27-4DFB-9685-B3C858191805}"/>
+                <a16:creationId xmlns:a16="http://schemas.microsoft.com/office/drawing/2014/main" id="{D0C8416A-71DF-4483-A230-5D50F579362E}"/>
               </a:ext>
             </a:extLst>
           </p:cNvPr>
@@ -2419,7 +2419,7 @@
           <p:cNvPr id="2" name="Left column">
             <a:extLst xmlns:a="http://schemas.openxmlformats.org/drawingml/2006/main">
               <a:ext uri="{FF2B5EF4-FFF2-40B4-BE49-F238E27FC236}">
-                <a16:creationId xmlns:a16="http://schemas.microsoft.com/office/drawing/2014/main" id="{561213B2-5FED-4DA2-A170-D410CBC6D8D5}"/>
+                <a16:creationId xmlns:a16="http://schemas.microsoft.com/office/drawing/2014/main" id="{14A3566A-0695-4ED8-B556-029E5C2184C4}"/>
               </a:ext>
             </a:extLst>
           </p:cNvPr>
@@ -2648,7 +2648,7 @@
           <p:cNvPr id="3" name="Right column">
             <a:extLst xmlns:a="http://schemas.openxmlformats.org/drawingml/2006/main">
               <a:ext uri="{FF2B5EF4-FFF2-40B4-BE49-F238E27FC236}">
-                <a16:creationId xmlns:a16="http://schemas.microsoft.com/office/drawing/2014/main" id="{76743086-8149-46C4-BA5E-C9F9B2545FFE}"/>
+                <a16:creationId xmlns:a16="http://schemas.microsoft.com/office/drawing/2014/main" id="{67E656AC-C785-470A-A98D-C39D08A215A8}"/>
               </a:ext>
             </a:extLst>
           </p:cNvPr>
@@ -2894,7 +2894,7 @@
           <p:cNvPr id="3" name="Title">
             <a:extLst xmlns:a="http://schemas.openxmlformats.org/drawingml/2006/main">
               <a:ext uri="{FF2B5EF4-FFF2-40B4-BE49-F238E27FC236}">
-                <a16:creationId xmlns:a16="http://schemas.microsoft.com/office/drawing/2014/main" id="{46C913FC-C871-45BC-B2A5-C1D650A3EFB4}"/>
+                <a16:creationId xmlns:a16="http://schemas.microsoft.com/office/drawing/2014/main" id="{3707D679-5D06-4423-B68D-1FD1D8087F7B}"/>
               </a:ext>
             </a:extLst>
           </p:cNvPr>
@@ -3123,7 +3123,7 @@
           <p:cNvPr id="2" name="Left column">
             <a:extLst xmlns:a="http://schemas.openxmlformats.org/drawingml/2006/main">
               <a:ext uri="{FF2B5EF4-FFF2-40B4-BE49-F238E27FC236}">
-                <a16:creationId xmlns:a16="http://schemas.microsoft.com/office/drawing/2014/main" id="{BC983D63-E90F-4B96-B718-44012C9B143E}"/>
+                <a16:creationId xmlns:a16="http://schemas.microsoft.com/office/drawing/2014/main" id="{D7ED4ECB-01DC-4418-9C44-C5A715559594}"/>
               </a:ext>
             </a:extLst>
           </p:cNvPr>
@@ -3390,12 +3390,12 @@
   </p:cSld>
   <p:clrMap bg1="lt1" tx1="dk1" bg2="lt2" tx2="dk2" accent1="accent1" accent2="accent2" accent3="accent3" accent4="accent4" accent5="accent5" accent6="accent6" hlink="hlink" folHlink="folHlink"/>
   <p:sldLayoutIdLst>
-    <p:sldLayoutId xmlns:r="http://schemas.openxmlformats.org/officeDocument/2006/relationships" id="2147483649" r:id="R8ffdefa7794d4180"/>
-    <p:sldLayoutId xmlns:r="http://schemas.openxmlformats.org/officeDocument/2006/relationships" id="2147483650" r:id="Reba17051e1ff4a14"/>
-    <p:sldLayoutId xmlns:r="http://schemas.openxmlformats.org/officeDocument/2006/relationships" id="2147483651" r:id="Rcd5f23b755974b86"/>
-    <p:sldLayoutId xmlns:r="http://schemas.openxmlformats.org/officeDocument/2006/relationships" id="2147483652" r:id="Rb77061b1a0f1475a"/>
-    <p:sldLayoutId xmlns:r="http://schemas.openxmlformats.org/officeDocument/2006/relationships" id="2147483653" r:id="Rcabed8bd73e14e07"/>
-    <p:sldLayoutId xmlns:r="http://schemas.openxmlformats.org/officeDocument/2006/relationships" id="2147483654" r:id="Rd85fe10fc48d4a68"/>
+    <p:sldLayoutId xmlns:r="http://schemas.openxmlformats.org/officeDocument/2006/relationships" id="2147483649" r:id="R5c74449a07f14090"/>
+    <p:sldLayoutId xmlns:r="http://schemas.openxmlformats.org/officeDocument/2006/relationships" id="2147483650" r:id="R74e9aaccdfa0479d"/>
+    <p:sldLayoutId xmlns:r="http://schemas.openxmlformats.org/officeDocument/2006/relationships" id="2147483651" r:id="R7466e0938a4a4cea"/>
+    <p:sldLayoutId xmlns:r="http://schemas.openxmlformats.org/officeDocument/2006/relationships" id="2147483652" r:id="R61cb7b129f844e9f"/>
+    <p:sldLayoutId xmlns:r="http://schemas.openxmlformats.org/officeDocument/2006/relationships" id="2147483653" r:id="R16be1751c11a49a6"/>
+    <p:sldLayoutId xmlns:r="http://schemas.openxmlformats.org/officeDocument/2006/relationships" id="2147483654" r:id="R4b9668541bc14163"/>
   </p:sldLayoutIdLst>
   <p:txStyles>
     <p:titleStyle>
@@ -3943,10 +3943,10 @@
       </p:grpSpPr>
       <p:sp>
         <p:nvSpPr>
-          <p:cNvPr id="9" name="三色の分岐係">
+          <p:cNvPr id="7" name="三色の分岐係">
             <a:extLst xmlns:a="http://schemas.openxmlformats.org/drawingml/2006/main">
               <a:ext uri="{FF2B5EF4-FFF2-40B4-BE49-F238E27FC236}">
-                <a16:creationId xmlns:a16="http://schemas.microsoft.com/office/drawing/2014/main" id="{CA04F4B6-B0A1-4A0B-8D30-7B50C82C5B38}"/>
+                <a16:creationId xmlns:a16="http://schemas.microsoft.com/office/drawing/2014/main" id="{A02A6EE5-7513-4466-8447-D9ACA33EE904}"/>
               </a:ext>
             </a:extLst>
           </p:cNvPr>
@@ -4108,7 +4108,7 @@
           <p:cNvPr id="2" name="品物を見分け、分岐を切り替える仕分けアクション">
             <a:extLst xmlns:a="http://schemas.openxmlformats.org/drawingml/2006/main">
               <a:ext uri="{FF2B5EF4-FFF2-40B4-BE49-F238E27FC236}">
-                <a16:creationId xmlns:a16="http://schemas.microsoft.com/office/drawing/2014/main" id="{58CB9F8B-3626-4186-8E73-27607A9C6FF9}"/>
+                <a16:creationId xmlns:a16="http://schemas.microsoft.com/office/drawing/2014/main" id="{D6679D04-12E8-4D18-96BC-B9BE34059ADA}"/>
               </a:ext>
             </a:extLst>
           </p:cNvPr>
@@ -4265,336 +4265,12 @@
           </a:p>
         </p:txBody>
       </p:sp>
-      <p:sp>
-        <p:nvSpPr>
-          <p:cNvPr id="3" name="三色の分岐係 / 企画書">
+      <p:pic>
+        <p:nvPicPr>
+          <p:cNvPr id="3" name="">
             <a:extLst xmlns:a="http://schemas.openxmlformats.org/drawingml/2006/main">
               <a:ext uri="{FF2B5EF4-FFF2-40B4-BE49-F238E27FC236}">
-                <a16:creationId xmlns:a16="http://schemas.microsoft.com/office/drawing/2014/main" id="{15CAE8AA-B3EF-4390-BF84-64EAFEF6C650}"/>
-              </a:ext>
-            </a:extLst>
-          </p:cNvPr>
-          <p:cNvSpPr>
-            <a:spLocks xmlns:a="http://schemas.openxmlformats.org/drawingml/2006/main" noGrp="1"/>
-          </p:cNvSpPr>
-          <p:nvPr/>
-        </p:nvSpPr>
-        <p:spPr>
-          <a:xfrm xmlns:a="http://schemas.openxmlformats.org/drawingml/2006/main">
-            <a:off x="609600" y="6448425"/>
-            <a:ext cx="9525000" cy="247650"/>
-          </a:xfrm>
-          <a:prstGeom xmlns:a="http://schemas.openxmlformats.org/drawingml/2006/main" prst="rect">
-            <a:avLst/>
-          </a:prstGeom>
-          <a:noFill xmlns:a="http://schemas.openxmlformats.org/drawingml/2006/main"/>
-          <a:ln xmlns:a="http://schemas.openxmlformats.org/drawingml/2006/main" w="0">
-            <a:noFill/>
-          </a:ln>
-        </p:spPr>
-        <p:txBody>
-          <a:bodyPr xmlns:a="http://schemas.openxmlformats.org/drawingml/2006/main" wrap="square" lIns="0" tIns="0" rIns="0" bIns="0" anchor="t">
-            <a:noAutofit/>
-          </a:bodyPr>
-          <a:lstStyle xmlns:a="http://schemas.openxmlformats.org/drawingml/2006/main">
-            <a:defPPr>
-              <a:defRPr sz="1200" b="0">
-                <a:solidFill>
-                  <a:srgbClr val="53616D"/>
-                </a:solidFill>
-                <a:latin typeface="Meiryo"/>
-                <a:ea typeface="Meiryo"/>
-                <a:cs typeface="Meiryo"/>
-              </a:defRPr>
-            </a:defPPr>
-            <a:lvl1pPr>
-              <a:defRPr sz="1200" b="0">
-                <a:solidFill>
-                  <a:srgbClr val="53616D"/>
-                </a:solidFill>
-                <a:latin typeface="Meiryo"/>
-                <a:ea typeface="Meiryo"/>
-                <a:cs typeface="Meiryo"/>
-              </a:defRPr>
-            </a:lvl1pPr>
-            <a:lvl2pPr>
-              <a:defRPr sz="1200" b="0">
-                <a:solidFill>
-                  <a:srgbClr val="53616D"/>
-                </a:solidFill>
-                <a:latin typeface="Meiryo"/>
-                <a:ea typeface="Meiryo"/>
-                <a:cs typeface="Meiryo"/>
-              </a:defRPr>
-            </a:lvl2pPr>
-            <a:lvl3pPr>
-              <a:defRPr sz="1200" b="0">
-                <a:solidFill>
-                  <a:srgbClr val="53616D"/>
-                </a:solidFill>
-                <a:latin typeface="Meiryo"/>
-                <a:ea typeface="Meiryo"/>
-                <a:cs typeface="Meiryo"/>
-              </a:defRPr>
-            </a:lvl3pPr>
-            <a:lvl4pPr>
-              <a:defRPr sz="1200" b="0">
-                <a:solidFill>
-                  <a:srgbClr val="53616D"/>
-                </a:solidFill>
-                <a:latin typeface="Meiryo"/>
-                <a:ea typeface="Meiryo"/>
-                <a:cs typeface="Meiryo"/>
-              </a:defRPr>
-            </a:lvl4pPr>
-            <a:lvl5pPr>
-              <a:defRPr sz="1200" b="0">
-                <a:solidFill>
-                  <a:srgbClr val="53616D"/>
-                </a:solidFill>
-                <a:latin typeface="Meiryo"/>
-                <a:ea typeface="Meiryo"/>
-                <a:cs typeface="Meiryo"/>
-              </a:defRPr>
-            </a:lvl5pPr>
-            <a:lvl6pPr>
-              <a:defRPr sz="1200" b="0">
-                <a:solidFill>
-                  <a:srgbClr val="53616D"/>
-                </a:solidFill>
-                <a:latin typeface="Meiryo"/>
-                <a:ea typeface="Meiryo"/>
-                <a:cs typeface="Meiryo"/>
-              </a:defRPr>
-            </a:lvl6pPr>
-            <a:lvl7pPr>
-              <a:defRPr sz="1200" b="0">
-                <a:solidFill>
-                  <a:srgbClr val="53616D"/>
-                </a:solidFill>
-                <a:latin typeface="Meiryo"/>
-                <a:ea typeface="Meiryo"/>
-                <a:cs typeface="Meiryo"/>
-              </a:defRPr>
-            </a:lvl7pPr>
-            <a:lvl8pPr>
-              <a:defRPr sz="1200" b="0">
-                <a:solidFill>
-                  <a:srgbClr val="53616D"/>
-                </a:solidFill>
-                <a:latin typeface="Meiryo"/>
-                <a:ea typeface="Meiryo"/>
-                <a:cs typeface="Meiryo"/>
-              </a:defRPr>
-            </a:lvl8pPr>
-            <a:lvl9pPr>
-              <a:defRPr sz="1200" b="0">
-                <a:solidFill>
-                  <a:srgbClr val="53616D"/>
-                </a:solidFill>
-                <a:latin typeface="Meiryo"/>
-                <a:ea typeface="Meiryo"/>
-                <a:cs typeface="Meiryo"/>
-              </a:defRPr>
-            </a:lvl9pPr>
-          </a:lstStyle>
-          <a:p xmlns:a="http://schemas.openxmlformats.org/drawingml/2006/main">
-            <a:pPr>
-              <a:lnSpc>
-                <a:spcPct val="118000"/>
-              </a:lnSpc>
-              <a:buNone/>
-              <a:defRPr sz="1200" b="0">
-                <a:solidFill>
-                  <a:srgbClr val="53616D"/>
-                </a:solidFill>
-                <a:latin typeface="Meiryo"/>
-                <a:ea typeface="Meiryo"/>
-                <a:cs typeface="Meiryo"/>
-              </a:defRPr>
-            </a:pPr>
-            <a:r>
-              <a:rPr sz="1200" b="0">
-                <a:solidFill>
-                  <a:srgbClr val="53616D"/>
-                </a:solidFill>
-                <a:latin typeface="Meiryo"/>
-                <a:ea typeface="Meiryo"/>
-                <a:cs typeface="Meiryo"/>
-              </a:rPr>
-              <a:t>三色の分岐係 / 企画書</a:t>
-            </a:r>
-          </a:p>
-        </p:txBody>
-      </p:sp>
-      <p:sp>
-        <p:nvSpPr>
-          <p:cNvPr id="4" name="01 / 06">
-            <a:extLst xmlns:a="http://schemas.openxmlformats.org/drawingml/2006/main">
-              <a:ext uri="{FF2B5EF4-FFF2-40B4-BE49-F238E27FC236}">
-                <a16:creationId xmlns:a16="http://schemas.microsoft.com/office/drawing/2014/main" id="{51F7B939-5479-44EC-BF31-DB2F9C433D57}"/>
-              </a:ext>
-            </a:extLst>
-          </p:cNvPr>
-          <p:cNvSpPr>
-            <a:spLocks xmlns:a="http://schemas.openxmlformats.org/drawingml/2006/main" noGrp="1"/>
-          </p:cNvSpPr>
-          <p:nvPr/>
-        </p:nvSpPr>
-        <p:spPr>
-          <a:xfrm xmlns:a="http://schemas.openxmlformats.org/drawingml/2006/main">
-            <a:off x="10668000" y="6448425"/>
-            <a:ext cx="952500" cy="247650"/>
-          </a:xfrm>
-          <a:prstGeom xmlns:a="http://schemas.openxmlformats.org/drawingml/2006/main" prst="rect">
-            <a:avLst/>
-          </a:prstGeom>
-          <a:noFill xmlns:a="http://schemas.openxmlformats.org/drawingml/2006/main"/>
-          <a:ln xmlns:a="http://schemas.openxmlformats.org/drawingml/2006/main" w="0">
-            <a:noFill/>
-          </a:ln>
-        </p:spPr>
-        <p:txBody>
-          <a:bodyPr xmlns:a="http://schemas.openxmlformats.org/drawingml/2006/main" wrap="square" lIns="0" tIns="0" rIns="0" bIns="0" anchor="t">
-            <a:noAutofit/>
-          </a:bodyPr>
-          <a:lstStyle xmlns:a="http://schemas.openxmlformats.org/drawingml/2006/main">
-            <a:defPPr>
-              <a:defRPr sz="1200" b="0">
-                <a:solidFill>
-                  <a:srgbClr val="53616D"/>
-                </a:solidFill>
-                <a:latin typeface="Meiryo"/>
-                <a:ea typeface="Meiryo"/>
-                <a:cs typeface="Meiryo"/>
-              </a:defRPr>
-            </a:defPPr>
-            <a:lvl1pPr>
-              <a:defRPr sz="1200" b="0">
-                <a:solidFill>
-                  <a:srgbClr val="53616D"/>
-                </a:solidFill>
-                <a:latin typeface="Meiryo"/>
-                <a:ea typeface="Meiryo"/>
-                <a:cs typeface="Meiryo"/>
-              </a:defRPr>
-            </a:lvl1pPr>
-            <a:lvl2pPr>
-              <a:defRPr sz="1200" b="0">
-                <a:solidFill>
-                  <a:srgbClr val="53616D"/>
-                </a:solidFill>
-                <a:latin typeface="Meiryo"/>
-                <a:ea typeface="Meiryo"/>
-                <a:cs typeface="Meiryo"/>
-              </a:defRPr>
-            </a:lvl2pPr>
-            <a:lvl3pPr>
-              <a:defRPr sz="1200" b="0">
-                <a:solidFill>
-                  <a:srgbClr val="53616D"/>
-                </a:solidFill>
-                <a:latin typeface="Meiryo"/>
-                <a:ea typeface="Meiryo"/>
-                <a:cs typeface="Meiryo"/>
-              </a:defRPr>
-            </a:lvl3pPr>
-            <a:lvl4pPr>
-              <a:defRPr sz="1200" b="0">
-                <a:solidFill>
-                  <a:srgbClr val="53616D"/>
-                </a:solidFill>
-                <a:latin typeface="Meiryo"/>
-                <a:ea typeface="Meiryo"/>
-                <a:cs typeface="Meiryo"/>
-              </a:defRPr>
-            </a:lvl4pPr>
-            <a:lvl5pPr>
-              <a:defRPr sz="1200" b="0">
-                <a:solidFill>
-                  <a:srgbClr val="53616D"/>
-                </a:solidFill>
-                <a:latin typeface="Meiryo"/>
-                <a:ea typeface="Meiryo"/>
-                <a:cs typeface="Meiryo"/>
-              </a:defRPr>
-            </a:lvl5pPr>
-            <a:lvl6pPr>
-              <a:defRPr sz="1200" b="0">
-                <a:solidFill>
-                  <a:srgbClr val="53616D"/>
-                </a:solidFill>
-                <a:latin typeface="Meiryo"/>
-                <a:ea typeface="Meiryo"/>
-                <a:cs typeface="Meiryo"/>
-              </a:defRPr>
-            </a:lvl6pPr>
-            <a:lvl7pPr>
-              <a:defRPr sz="1200" b="0">
-                <a:solidFill>
-                  <a:srgbClr val="53616D"/>
-                </a:solidFill>
-                <a:latin typeface="Meiryo"/>
-                <a:ea typeface="Meiryo"/>
-                <a:cs typeface="Meiryo"/>
-              </a:defRPr>
-            </a:lvl7pPr>
-            <a:lvl8pPr>
-              <a:defRPr sz="1200" b="0">
-                <a:solidFill>
-                  <a:srgbClr val="53616D"/>
-                </a:solidFill>
-                <a:latin typeface="Meiryo"/>
-                <a:ea typeface="Meiryo"/>
-                <a:cs typeface="Meiryo"/>
-              </a:defRPr>
-            </a:lvl8pPr>
-            <a:lvl9pPr>
-              <a:defRPr sz="1200" b="0">
-                <a:solidFill>
-                  <a:srgbClr val="53616D"/>
-                </a:solidFill>
-                <a:latin typeface="Meiryo"/>
-                <a:ea typeface="Meiryo"/>
-                <a:cs typeface="Meiryo"/>
-              </a:defRPr>
-            </a:lvl9pPr>
-          </a:lstStyle>
-          <a:p xmlns:a="http://schemas.openxmlformats.org/drawingml/2006/main">
-            <a:pPr>
-              <a:lnSpc>
-                <a:spcPct val="118000"/>
-              </a:lnSpc>
-              <a:buNone/>
-              <a:defRPr sz="1200" b="0">
-                <a:solidFill>
-                  <a:srgbClr val="53616D"/>
-                </a:solidFill>
-                <a:latin typeface="Meiryo"/>
-                <a:ea typeface="Meiryo"/>
-                <a:cs typeface="Meiryo"/>
-              </a:defRPr>
-            </a:pPr>
-            <a:r>
-              <a:rPr sz="1200" b="0">
-                <a:solidFill>
-                  <a:srgbClr val="53616D"/>
-                </a:solidFill>
-                <a:latin typeface="Meiryo"/>
-                <a:ea typeface="Meiryo"/>
-                <a:cs typeface="Meiryo"/>
-              </a:rPr>
-              <a:t>01 / 06</a:t>
-            </a:r>
-          </a:p>
-        </p:txBody>
-      </p:sp>
-      <p:pic>
-        <p:nvPicPr>
-          <p:cNvPr id="5" name="">
-            <a:extLst xmlns:a="http://schemas.openxmlformats.org/drawingml/2006/main">
-              <a:ext uri="{FF2B5EF4-FFF2-40B4-BE49-F238E27FC236}">
-                <a16:creationId xmlns:a16="http://schemas.microsoft.com/office/drawing/2014/main" id="{A7FA4B3C-CE35-414E-852A-75CBD983F9BA}"/>
+                <a16:creationId xmlns:a16="http://schemas.microsoft.com/office/drawing/2014/main" id="{D937D6CD-A310-4BC3-815C-567983F977A2}"/>
               </a:ext>
             </a:extLst>
           </p:cNvPr>
@@ -4604,7 +4280,7 @@
           <p:nvPr/>
         </p:nvPicPr>
         <p:blipFill>
-          <a:blip xmlns:r="http://schemas.openxmlformats.org/officeDocument/2006/relationships" xmlns:a="http://schemas.openxmlformats.org/drawingml/2006/main" r:embed="R148d2d85f84a4fdc"/>
+          <a:blip xmlns:r="http://schemas.openxmlformats.org/officeDocument/2006/relationships" xmlns:a="http://schemas.openxmlformats.org/drawingml/2006/main" r:embed="R705fa155b99840b1"/>
           <a:stretch xmlns:a="http://schemas.openxmlformats.org/drawingml/2006/main"/>
         </p:blipFill>
         <p:spPr>
@@ -4619,10 +4295,10 @@
       </p:pic>
       <p:sp>
         <p:nvSpPr>
-          <p:cNvPr id="6" name="種類だけでは&#10;決められない。">
+          <p:cNvPr id="4" name="種類だけでは&#10;決められない。">
             <a:extLst xmlns:a="http://schemas.openxmlformats.org/drawingml/2006/main">
               <a:ext uri="{FF2B5EF4-FFF2-40B4-BE49-F238E27FC236}">
-                <a16:creationId xmlns:a16="http://schemas.microsoft.com/office/drawing/2014/main" id="{2B06F1EB-2A68-4A55-B949-03BCF39F6216}"/>
+                <a16:creationId xmlns:a16="http://schemas.microsoft.com/office/drawing/2014/main" id="{42D0C52B-3430-4DF7-A0A5-487F34328D3C}"/>
               </a:ext>
             </a:extLst>
           </p:cNvPr>
@@ -4808,10 +4484,10 @@
       </p:sp>
       <p:sp>
         <p:nvSpPr>
-          <p:cNvPr id="7" name="流れてきた品物を見て、&#10;正しいレーンへ。&#10;壊れていたら、&#10;仕分けずに送り">
+          <p:cNvPr id="5" name="流れてきた品物を見て、&#10;正しいレーンへ。&#10;壊れていたら、&#10;仕分けずに送り">
             <a:extLst xmlns:a="http://schemas.openxmlformats.org/drawingml/2006/main">
               <a:ext uri="{FF2B5EF4-FFF2-40B4-BE49-F238E27FC236}">
-                <a16:creationId xmlns:a16="http://schemas.microsoft.com/office/drawing/2014/main" id="{173086BF-B49B-4C61-9916-DE5CF5CD3109}"/>
+                <a16:creationId xmlns:a16="http://schemas.microsoft.com/office/drawing/2014/main" id="{F4A98CCB-B6FA-43BC-BA71-58D01422475C}"/>
               </a:ext>
             </a:extLst>
           </p:cNvPr>
@@ -5051,10 +4727,10 @@
       </p:sp>
       <p:sp>
         <p:nvSpPr>
-          <p:cNvPr id="8" name="制作人数：5人 / Unity 6&#10;企画書作成：島本善太">
+          <p:cNvPr id="6" name="制作人数：5人 / Unity 6&#10;企画書作成：島本善太">
             <a:extLst xmlns:a="http://schemas.openxmlformats.org/drawingml/2006/main">
               <a:ext uri="{FF2B5EF4-FFF2-40B4-BE49-F238E27FC236}">
-                <a16:creationId xmlns:a16="http://schemas.microsoft.com/office/drawing/2014/main" id="{AF93C063-67A5-4A37-ABEA-2FD4A149FD47}"/>
+                <a16:creationId xmlns:a16="http://schemas.microsoft.com/office/drawing/2014/main" id="{0E383FCA-2C19-43BC-8F3F-FD2B2025EE9E}"/>
               </a:ext>
             </a:extLst>
           </p:cNvPr>
@@ -5241,7 +4917,7 @@
     </p:spTree>
     <p:extLst>
       <p:ext uri="{BB962C8B-B14F-4D97-AF65-F5344CB8AC3E}">
-        <p14:creationId xmlns:p14="http://schemas.microsoft.com/office/powerpoint/2010/main" val="1912988715"/>
+        <p14:creationId xmlns:p14="http://schemas.microsoft.com/office/powerpoint/2010/main" val="726650435"/>
       </p:ext>
     </p:extLst>
   </p:cSld>
@@ -5269,10 +4945,10 @@
       </p:grpSpPr>
       <p:sp>
         <p:nvSpPr>
-          <p:cNvPr id="11" name="流れる品物を、その場で判断する">
+          <p:cNvPr id="9" name="流れる品物を、その場で判断する">
             <a:extLst xmlns:a="http://schemas.openxmlformats.org/drawingml/2006/main">
               <a:ext uri="{FF2B5EF4-FFF2-40B4-BE49-F238E27FC236}">
-                <a16:creationId xmlns:a16="http://schemas.microsoft.com/office/drawing/2014/main" id="{0F0AF934-7D40-4CC9-B11E-9E9DD9F01DEF}"/>
+                <a16:creationId xmlns:a16="http://schemas.microsoft.com/office/drawing/2014/main" id="{E659F237-AD88-4CFF-A9C1-13A92D1564F4}"/>
               </a:ext>
             </a:extLst>
           </p:cNvPr>
@@ -5434,7 +5110,7 @@
           <p:cNvPr id="2" name="「何の品物か」と「正常か」を見分ける遊び">
             <a:extLst xmlns:a="http://schemas.openxmlformats.org/drawingml/2006/main">
               <a:ext uri="{FF2B5EF4-FFF2-40B4-BE49-F238E27FC236}">
-                <a16:creationId xmlns:a16="http://schemas.microsoft.com/office/drawing/2014/main" id="{44160FA3-EF1B-45AA-AE18-B2621B6A9D24}"/>
+                <a16:creationId xmlns:a16="http://schemas.microsoft.com/office/drawing/2014/main" id="{57C1A2EA-4E7D-4B44-8E04-282D818D21EA}"/>
               </a:ext>
             </a:extLst>
           </p:cNvPr>
@@ -5591,336 +5267,12 @@
           </a:p>
         </p:txBody>
       </p:sp>
-      <p:sp>
-        <p:nvSpPr>
-          <p:cNvPr id="3" name="三色の分岐係 / 企画書">
+      <p:pic>
+        <p:nvPicPr>
+          <p:cNvPr id="3" name="">
             <a:extLst xmlns:a="http://schemas.openxmlformats.org/drawingml/2006/main">
               <a:ext uri="{FF2B5EF4-FFF2-40B4-BE49-F238E27FC236}">
-                <a16:creationId xmlns:a16="http://schemas.microsoft.com/office/drawing/2014/main" id="{E54C59BB-8F01-4128-A3FA-53A01B2B4958}"/>
-              </a:ext>
-            </a:extLst>
-          </p:cNvPr>
-          <p:cNvSpPr>
-            <a:spLocks xmlns:a="http://schemas.openxmlformats.org/drawingml/2006/main" noGrp="1"/>
-          </p:cNvSpPr>
-          <p:nvPr/>
-        </p:nvSpPr>
-        <p:spPr>
-          <a:xfrm xmlns:a="http://schemas.openxmlformats.org/drawingml/2006/main">
-            <a:off x="609600" y="6448425"/>
-            <a:ext cx="9525000" cy="247650"/>
-          </a:xfrm>
-          <a:prstGeom xmlns:a="http://schemas.openxmlformats.org/drawingml/2006/main" prst="rect">
-            <a:avLst/>
-          </a:prstGeom>
-          <a:noFill xmlns:a="http://schemas.openxmlformats.org/drawingml/2006/main"/>
-          <a:ln xmlns:a="http://schemas.openxmlformats.org/drawingml/2006/main" w="0">
-            <a:noFill/>
-          </a:ln>
-        </p:spPr>
-        <p:txBody>
-          <a:bodyPr xmlns:a="http://schemas.openxmlformats.org/drawingml/2006/main" wrap="square" lIns="0" tIns="0" rIns="0" bIns="0" anchor="t">
-            <a:noAutofit/>
-          </a:bodyPr>
-          <a:lstStyle xmlns:a="http://schemas.openxmlformats.org/drawingml/2006/main">
-            <a:defPPr>
-              <a:defRPr sz="1200" b="0">
-                <a:solidFill>
-                  <a:srgbClr val="53616D"/>
-                </a:solidFill>
-                <a:latin typeface="Meiryo"/>
-                <a:ea typeface="Meiryo"/>
-                <a:cs typeface="Meiryo"/>
-              </a:defRPr>
-            </a:defPPr>
-            <a:lvl1pPr>
-              <a:defRPr sz="1200" b="0">
-                <a:solidFill>
-                  <a:srgbClr val="53616D"/>
-                </a:solidFill>
-                <a:latin typeface="Meiryo"/>
-                <a:ea typeface="Meiryo"/>
-                <a:cs typeface="Meiryo"/>
-              </a:defRPr>
-            </a:lvl1pPr>
-            <a:lvl2pPr>
-              <a:defRPr sz="1200" b="0">
-                <a:solidFill>
-                  <a:srgbClr val="53616D"/>
-                </a:solidFill>
-                <a:latin typeface="Meiryo"/>
-                <a:ea typeface="Meiryo"/>
-                <a:cs typeface="Meiryo"/>
-              </a:defRPr>
-            </a:lvl2pPr>
-            <a:lvl3pPr>
-              <a:defRPr sz="1200" b="0">
-                <a:solidFill>
-                  <a:srgbClr val="53616D"/>
-                </a:solidFill>
-                <a:latin typeface="Meiryo"/>
-                <a:ea typeface="Meiryo"/>
-                <a:cs typeface="Meiryo"/>
-              </a:defRPr>
-            </a:lvl3pPr>
-            <a:lvl4pPr>
-              <a:defRPr sz="1200" b="0">
-                <a:solidFill>
-                  <a:srgbClr val="53616D"/>
-                </a:solidFill>
-                <a:latin typeface="Meiryo"/>
-                <a:ea typeface="Meiryo"/>
-                <a:cs typeface="Meiryo"/>
-              </a:defRPr>
-            </a:lvl4pPr>
-            <a:lvl5pPr>
-              <a:defRPr sz="1200" b="0">
-                <a:solidFill>
-                  <a:srgbClr val="53616D"/>
-                </a:solidFill>
-                <a:latin typeface="Meiryo"/>
-                <a:ea typeface="Meiryo"/>
-                <a:cs typeface="Meiryo"/>
-              </a:defRPr>
-            </a:lvl5pPr>
-            <a:lvl6pPr>
-              <a:defRPr sz="1200" b="0">
-                <a:solidFill>
-                  <a:srgbClr val="53616D"/>
-                </a:solidFill>
-                <a:latin typeface="Meiryo"/>
-                <a:ea typeface="Meiryo"/>
-                <a:cs typeface="Meiryo"/>
-              </a:defRPr>
-            </a:lvl6pPr>
-            <a:lvl7pPr>
-              <a:defRPr sz="1200" b="0">
-                <a:solidFill>
-                  <a:srgbClr val="53616D"/>
-                </a:solidFill>
-                <a:latin typeface="Meiryo"/>
-                <a:ea typeface="Meiryo"/>
-                <a:cs typeface="Meiryo"/>
-              </a:defRPr>
-            </a:lvl7pPr>
-            <a:lvl8pPr>
-              <a:defRPr sz="1200" b="0">
-                <a:solidFill>
-                  <a:srgbClr val="53616D"/>
-                </a:solidFill>
-                <a:latin typeface="Meiryo"/>
-                <a:ea typeface="Meiryo"/>
-                <a:cs typeface="Meiryo"/>
-              </a:defRPr>
-            </a:lvl8pPr>
-            <a:lvl9pPr>
-              <a:defRPr sz="1200" b="0">
-                <a:solidFill>
-                  <a:srgbClr val="53616D"/>
-                </a:solidFill>
-                <a:latin typeface="Meiryo"/>
-                <a:ea typeface="Meiryo"/>
-                <a:cs typeface="Meiryo"/>
-              </a:defRPr>
-            </a:lvl9pPr>
-          </a:lstStyle>
-          <a:p xmlns:a="http://schemas.openxmlformats.org/drawingml/2006/main">
-            <a:pPr>
-              <a:lnSpc>
-                <a:spcPct val="118000"/>
-              </a:lnSpc>
-              <a:buNone/>
-              <a:defRPr sz="1200" b="0">
-                <a:solidFill>
-                  <a:srgbClr val="53616D"/>
-                </a:solidFill>
-                <a:latin typeface="Meiryo"/>
-                <a:ea typeface="Meiryo"/>
-                <a:cs typeface="Meiryo"/>
-              </a:defRPr>
-            </a:pPr>
-            <a:r>
-              <a:rPr sz="1200" b="0">
-                <a:solidFill>
-                  <a:srgbClr val="53616D"/>
-                </a:solidFill>
-                <a:latin typeface="Meiryo"/>
-                <a:ea typeface="Meiryo"/>
-                <a:cs typeface="Meiryo"/>
-              </a:rPr>
-              <a:t>三色の分岐係 / 企画書</a:t>
-            </a:r>
-          </a:p>
-        </p:txBody>
-      </p:sp>
-      <p:sp>
-        <p:nvSpPr>
-          <p:cNvPr id="4" name="02 / 06">
-            <a:extLst xmlns:a="http://schemas.openxmlformats.org/drawingml/2006/main">
-              <a:ext uri="{FF2B5EF4-FFF2-40B4-BE49-F238E27FC236}">
-                <a16:creationId xmlns:a16="http://schemas.microsoft.com/office/drawing/2014/main" id="{FD72BBF7-243F-4768-AE3B-7B3C571CE8B1}"/>
-              </a:ext>
-            </a:extLst>
-          </p:cNvPr>
-          <p:cNvSpPr>
-            <a:spLocks xmlns:a="http://schemas.openxmlformats.org/drawingml/2006/main" noGrp="1"/>
-          </p:cNvSpPr>
-          <p:nvPr/>
-        </p:nvSpPr>
-        <p:spPr>
-          <a:xfrm xmlns:a="http://schemas.openxmlformats.org/drawingml/2006/main">
-            <a:off x="10668000" y="6448425"/>
-            <a:ext cx="952500" cy="247650"/>
-          </a:xfrm>
-          <a:prstGeom xmlns:a="http://schemas.openxmlformats.org/drawingml/2006/main" prst="rect">
-            <a:avLst/>
-          </a:prstGeom>
-          <a:noFill xmlns:a="http://schemas.openxmlformats.org/drawingml/2006/main"/>
-          <a:ln xmlns:a="http://schemas.openxmlformats.org/drawingml/2006/main" w="0">
-            <a:noFill/>
-          </a:ln>
-        </p:spPr>
-        <p:txBody>
-          <a:bodyPr xmlns:a="http://schemas.openxmlformats.org/drawingml/2006/main" wrap="square" lIns="0" tIns="0" rIns="0" bIns="0" anchor="t">
-            <a:noAutofit/>
-          </a:bodyPr>
-          <a:lstStyle xmlns:a="http://schemas.openxmlformats.org/drawingml/2006/main">
-            <a:defPPr>
-              <a:defRPr sz="1200" b="0">
-                <a:solidFill>
-                  <a:srgbClr val="53616D"/>
-                </a:solidFill>
-                <a:latin typeface="Meiryo"/>
-                <a:ea typeface="Meiryo"/>
-                <a:cs typeface="Meiryo"/>
-              </a:defRPr>
-            </a:defPPr>
-            <a:lvl1pPr>
-              <a:defRPr sz="1200" b="0">
-                <a:solidFill>
-                  <a:srgbClr val="53616D"/>
-                </a:solidFill>
-                <a:latin typeface="Meiryo"/>
-                <a:ea typeface="Meiryo"/>
-                <a:cs typeface="Meiryo"/>
-              </a:defRPr>
-            </a:lvl1pPr>
-            <a:lvl2pPr>
-              <a:defRPr sz="1200" b="0">
-                <a:solidFill>
-                  <a:srgbClr val="53616D"/>
-                </a:solidFill>
-                <a:latin typeface="Meiryo"/>
-                <a:ea typeface="Meiryo"/>
-                <a:cs typeface="Meiryo"/>
-              </a:defRPr>
-            </a:lvl2pPr>
-            <a:lvl3pPr>
-              <a:defRPr sz="1200" b="0">
-                <a:solidFill>
-                  <a:srgbClr val="53616D"/>
-                </a:solidFill>
-                <a:latin typeface="Meiryo"/>
-                <a:ea typeface="Meiryo"/>
-                <a:cs typeface="Meiryo"/>
-              </a:defRPr>
-            </a:lvl3pPr>
-            <a:lvl4pPr>
-              <a:defRPr sz="1200" b="0">
-                <a:solidFill>
-                  <a:srgbClr val="53616D"/>
-                </a:solidFill>
-                <a:latin typeface="Meiryo"/>
-                <a:ea typeface="Meiryo"/>
-                <a:cs typeface="Meiryo"/>
-              </a:defRPr>
-            </a:lvl4pPr>
-            <a:lvl5pPr>
-              <a:defRPr sz="1200" b="0">
-                <a:solidFill>
-                  <a:srgbClr val="53616D"/>
-                </a:solidFill>
-                <a:latin typeface="Meiryo"/>
-                <a:ea typeface="Meiryo"/>
-                <a:cs typeface="Meiryo"/>
-              </a:defRPr>
-            </a:lvl5pPr>
-            <a:lvl6pPr>
-              <a:defRPr sz="1200" b="0">
-                <a:solidFill>
-                  <a:srgbClr val="53616D"/>
-                </a:solidFill>
-                <a:latin typeface="Meiryo"/>
-                <a:ea typeface="Meiryo"/>
-                <a:cs typeface="Meiryo"/>
-              </a:defRPr>
-            </a:lvl6pPr>
-            <a:lvl7pPr>
-              <a:defRPr sz="1200" b="0">
-                <a:solidFill>
-                  <a:srgbClr val="53616D"/>
-                </a:solidFill>
-                <a:latin typeface="Meiryo"/>
-                <a:ea typeface="Meiryo"/>
-                <a:cs typeface="Meiryo"/>
-              </a:defRPr>
-            </a:lvl7pPr>
-            <a:lvl8pPr>
-              <a:defRPr sz="1200" b="0">
-                <a:solidFill>
-                  <a:srgbClr val="53616D"/>
-                </a:solidFill>
-                <a:latin typeface="Meiryo"/>
-                <a:ea typeface="Meiryo"/>
-                <a:cs typeface="Meiryo"/>
-              </a:defRPr>
-            </a:lvl8pPr>
-            <a:lvl9pPr>
-              <a:defRPr sz="1200" b="0">
-                <a:solidFill>
-                  <a:srgbClr val="53616D"/>
-                </a:solidFill>
-                <a:latin typeface="Meiryo"/>
-                <a:ea typeface="Meiryo"/>
-                <a:cs typeface="Meiryo"/>
-              </a:defRPr>
-            </a:lvl9pPr>
-          </a:lstStyle>
-          <a:p xmlns:a="http://schemas.openxmlformats.org/drawingml/2006/main">
-            <a:pPr>
-              <a:lnSpc>
-                <a:spcPct val="118000"/>
-              </a:lnSpc>
-              <a:buNone/>
-              <a:defRPr sz="1200" b="0">
-                <a:solidFill>
-                  <a:srgbClr val="53616D"/>
-                </a:solidFill>
-                <a:latin typeface="Meiryo"/>
-                <a:ea typeface="Meiryo"/>
-                <a:cs typeface="Meiryo"/>
-              </a:defRPr>
-            </a:pPr>
-            <a:r>
-              <a:rPr sz="1200" b="0">
-                <a:solidFill>
-                  <a:srgbClr val="53616D"/>
-                </a:solidFill>
-                <a:latin typeface="Meiryo"/>
-                <a:ea typeface="Meiryo"/>
-                <a:cs typeface="Meiryo"/>
-              </a:rPr>
-              <a:t>02 / 06</a:t>
-            </a:r>
-          </a:p>
-        </p:txBody>
-      </p:sp>
-      <p:pic>
-        <p:nvPicPr>
-          <p:cNvPr id="5" name="">
-            <a:extLst xmlns:a="http://schemas.openxmlformats.org/drawingml/2006/main">
-              <a:ext uri="{FF2B5EF4-FFF2-40B4-BE49-F238E27FC236}">
-                <a16:creationId xmlns:a16="http://schemas.microsoft.com/office/drawing/2014/main" id="{AAFFA8D1-7C37-4E8F-878E-3448607D1810}"/>
+                <a16:creationId xmlns:a16="http://schemas.microsoft.com/office/drawing/2014/main" id="{6E0CB063-B5B5-444D-AD49-28CA7B348AD9}"/>
               </a:ext>
             </a:extLst>
           </p:cNvPr>
@@ -5930,7 +5282,7 @@
           <p:nvPr/>
         </p:nvPicPr>
         <p:blipFill>
-          <a:blip xmlns:r="http://schemas.openxmlformats.org/officeDocument/2006/relationships" xmlns:a="http://schemas.openxmlformats.org/drawingml/2006/main" r:embed="Rd1eb4aaafd474e7a"/>
+          <a:blip xmlns:r="http://schemas.openxmlformats.org/officeDocument/2006/relationships" xmlns:a="http://schemas.openxmlformats.org/drawingml/2006/main" r:embed="R1ac669609d9c4201"/>
           <a:stretch xmlns:a="http://schemas.openxmlformats.org/drawingml/2006/main"/>
         </p:blipFill>
         <p:spPr>
@@ -5945,10 +5297,10 @@
       </p:pic>
       <p:sp>
         <p:nvSpPr>
-          <p:cNvPr id="6" name="基本の流れ">
+          <p:cNvPr id="4" name="基本の流れ">
             <a:extLst xmlns:a="http://schemas.openxmlformats.org/drawingml/2006/main">
               <a:ext uri="{FF2B5EF4-FFF2-40B4-BE49-F238E27FC236}">
-                <a16:creationId xmlns:a16="http://schemas.microsoft.com/office/drawing/2014/main" id="{8494927A-2918-4C45-8A07-AC5674375A06}"/>
+                <a16:creationId xmlns:a16="http://schemas.microsoft.com/office/drawing/2014/main" id="{FBB72884-4C96-4CD1-A52A-001D783E8D41}"/>
               </a:ext>
             </a:extLst>
           </p:cNvPr>
@@ -6107,10 +5459,10 @@
       </p:sp>
       <p:sp>
         <p:nvSpPr>
-          <p:cNvPr id="7" name="品物を見る。&#10;送る方向を選ぶ。&#10;結果を確認して、次へ。">
+          <p:cNvPr id="5" name="品物を見る。&#10;送る方向を選ぶ。&#10;結果を確認して、次へ。">
             <a:extLst xmlns:a="http://schemas.openxmlformats.org/drawingml/2006/main">
               <a:ext uri="{FF2B5EF4-FFF2-40B4-BE49-F238E27FC236}">
-                <a16:creationId xmlns:a16="http://schemas.microsoft.com/office/drawing/2014/main" id="{961DD89A-B178-4EBD-B131-62D94144F045}"/>
+                <a16:creationId xmlns:a16="http://schemas.microsoft.com/office/drawing/2014/main" id="{8A7B51C2-EECB-4BEE-9AD9-AAAE681A052F}"/>
               </a:ext>
             </a:extLst>
           </p:cNvPr>
@@ -6323,10 +5675,10 @@
       </p:sp>
       <p:sp>
         <p:nvSpPr>
-          <p:cNvPr id="8" name="想定するプレイヤー">
+          <p:cNvPr id="6" name="想定するプレイヤー">
             <a:extLst xmlns:a="http://schemas.openxmlformats.org/drawingml/2006/main">
               <a:ext uri="{FF2B5EF4-FFF2-40B4-BE49-F238E27FC236}">
-                <a16:creationId xmlns:a16="http://schemas.microsoft.com/office/drawing/2014/main" id="{8F53E32D-B19F-450B-BD82-38AE21AD0496}"/>
+                <a16:creationId xmlns:a16="http://schemas.microsoft.com/office/drawing/2014/main" id="{608E1186-EF46-4447-8DA4-8F27BB40BFCC}"/>
               </a:ext>
             </a:extLst>
           </p:cNvPr>
@@ -6485,10 +5837,10 @@
       </p:sp>
       <p:sp>
         <p:nvSpPr>
-          <p:cNvPr id="9" name="観察と素早い判断で、&#10;スコア更新を楽しみたい人。&#10;少ないキーで挑戦できま">
+          <p:cNvPr id="7" name="観察と素早い判断で、&#10;スコア更新を楽しみたい人。&#10;少ないキーで挑戦できま">
             <a:extLst xmlns:a="http://schemas.openxmlformats.org/drawingml/2006/main">
               <a:ext uri="{FF2B5EF4-FFF2-40B4-BE49-F238E27FC236}">
-                <a16:creationId xmlns:a16="http://schemas.microsoft.com/office/drawing/2014/main" id="{CDB58685-C027-4F87-B92E-2EC060EAC22C}"/>
+                <a16:creationId xmlns:a16="http://schemas.microsoft.com/office/drawing/2014/main" id="{4E086317-78F4-47BA-B6AD-88AA778C5907}"/>
               </a:ext>
             </a:extLst>
           </p:cNvPr>
@@ -6701,10 +6053,10 @@
       </p:sp>
       <p:sp>
         <p:nvSpPr>
-          <p:cNvPr id="10" name="分岐点までの短い時間に、判断を間に合わせる緊張感を狙います。">
+          <p:cNvPr id="8" name="分岐点までの短い時間に、判断を間に合わせる緊張感を狙います。">
             <a:extLst xmlns:a="http://schemas.openxmlformats.org/drawingml/2006/main">
               <a:ext uri="{FF2B5EF4-FFF2-40B4-BE49-F238E27FC236}">
-                <a16:creationId xmlns:a16="http://schemas.microsoft.com/office/drawing/2014/main" id="{68BF5DB2-9CD7-425B-8B4E-996E90624824}"/>
+                <a16:creationId xmlns:a16="http://schemas.microsoft.com/office/drawing/2014/main" id="{97F91A95-C78D-4C0E-8D12-4DD18A8DD130}"/>
               </a:ext>
             </a:extLst>
           </p:cNvPr>
@@ -6864,7 +6216,7 @@
     </p:spTree>
     <p:extLst>
       <p:ext uri="{BB962C8B-B14F-4D97-AF65-F5344CB8AC3E}">
-        <p14:creationId xmlns:p14="http://schemas.microsoft.com/office/powerpoint/2010/main" val="1274084374"/>
+        <p14:creationId xmlns:p14="http://schemas.microsoft.com/office/powerpoint/2010/main" val="441257517"/>
       </p:ext>
     </p:extLst>
   </p:cSld>
@@ -6892,10 +6244,10 @@
       </p:grpSpPr>
       <p:sp>
         <p:nvSpPr>
-          <p:cNvPr id="12" name="同じ種類でも、送り先が変わる">
+          <p:cNvPr id="10" name="同じ種類でも、送り先が変わる">
             <a:extLst xmlns:a="http://schemas.openxmlformats.org/drawingml/2006/main">
               <a:ext uri="{FF2B5EF4-FFF2-40B4-BE49-F238E27FC236}">
-                <a16:creationId xmlns:a16="http://schemas.microsoft.com/office/drawing/2014/main" id="{18B57A76-0F31-4B55-8CB9-6EF6559CE460}"/>
+                <a16:creationId xmlns:a16="http://schemas.microsoft.com/office/drawing/2014/main" id="{4D6DDE98-123A-4AA4-A18C-18F2BA5F755A}"/>
               </a:ext>
             </a:extLst>
           </p:cNvPr>
@@ -7057,7 +6409,7 @@
           <p:cNvPr id="2" name="正常品は仕分け、不良品は返却">
             <a:extLst xmlns:a="http://schemas.openxmlformats.org/drawingml/2006/main">
               <a:ext uri="{FF2B5EF4-FFF2-40B4-BE49-F238E27FC236}">
-                <a16:creationId xmlns:a16="http://schemas.microsoft.com/office/drawing/2014/main" id="{D59A89B7-F6A1-4558-9114-049ED6AB79B2}"/>
+                <a16:creationId xmlns:a16="http://schemas.microsoft.com/office/drawing/2014/main" id="{4E567A8B-FD3F-444A-A623-641EC8A7EDCA}"/>
               </a:ext>
             </a:extLst>
           </p:cNvPr>
@@ -7214,336 +6566,12 @@
           </a:p>
         </p:txBody>
       </p:sp>
-      <p:sp>
-        <p:nvSpPr>
-          <p:cNvPr id="3" name="三色の分岐係 / 企画書">
+      <p:pic>
+        <p:nvPicPr>
+          <p:cNvPr id="3" name="">
             <a:extLst xmlns:a="http://schemas.openxmlformats.org/drawingml/2006/main">
               <a:ext uri="{FF2B5EF4-FFF2-40B4-BE49-F238E27FC236}">
-                <a16:creationId xmlns:a16="http://schemas.microsoft.com/office/drawing/2014/main" id="{D8D6C09D-4949-4D28-B418-9A1A30565829}"/>
-              </a:ext>
-            </a:extLst>
-          </p:cNvPr>
-          <p:cNvSpPr>
-            <a:spLocks xmlns:a="http://schemas.openxmlformats.org/drawingml/2006/main" noGrp="1"/>
-          </p:cNvSpPr>
-          <p:nvPr/>
-        </p:nvSpPr>
-        <p:spPr>
-          <a:xfrm xmlns:a="http://schemas.openxmlformats.org/drawingml/2006/main">
-            <a:off x="609600" y="6448425"/>
-            <a:ext cx="9525000" cy="247650"/>
-          </a:xfrm>
-          <a:prstGeom xmlns:a="http://schemas.openxmlformats.org/drawingml/2006/main" prst="rect">
-            <a:avLst/>
-          </a:prstGeom>
-          <a:noFill xmlns:a="http://schemas.openxmlformats.org/drawingml/2006/main"/>
-          <a:ln xmlns:a="http://schemas.openxmlformats.org/drawingml/2006/main" w="0">
-            <a:noFill/>
-          </a:ln>
-        </p:spPr>
-        <p:txBody>
-          <a:bodyPr xmlns:a="http://schemas.openxmlformats.org/drawingml/2006/main" wrap="square" lIns="0" tIns="0" rIns="0" bIns="0" anchor="t">
-            <a:noAutofit/>
-          </a:bodyPr>
-          <a:lstStyle xmlns:a="http://schemas.openxmlformats.org/drawingml/2006/main">
-            <a:defPPr>
-              <a:defRPr sz="1200" b="0">
-                <a:solidFill>
-                  <a:srgbClr val="53616D"/>
-                </a:solidFill>
-                <a:latin typeface="Meiryo"/>
-                <a:ea typeface="Meiryo"/>
-                <a:cs typeface="Meiryo"/>
-              </a:defRPr>
-            </a:defPPr>
-            <a:lvl1pPr>
-              <a:defRPr sz="1200" b="0">
-                <a:solidFill>
-                  <a:srgbClr val="53616D"/>
-                </a:solidFill>
-                <a:latin typeface="Meiryo"/>
-                <a:ea typeface="Meiryo"/>
-                <a:cs typeface="Meiryo"/>
-              </a:defRPr>
-            </a:lvl1pPr>
-            <a:lvl2pPr>
-              <a:defRPr sz="1200" b="0">
-                <a:solidFill>
-                  <a:srgbClr val="53616D"/>
-                </a:solidFill>
-                <a:latin typeface="Meiryo"/>
-                <a:ea typeface="Meiryo"/>
-                <a:cs typeface="Meiryo"/>
-              </a:defRPr>
-            </a:lvl2pPr>
-            <a:lvl3pPr>
-              <a:defRPr sz="1200" b="0">
-                <a:solidFill>
-                  <a:srgbClr val="53616D"/>
-                </a:solidFill>
-                <a:latin typeface="Meiryo"/>
-                <a:ea typeface="Meiryo"/>
-                <a:cs typeface="Meiryo"/>
-              </a:defRPr>
-            </a:lvl3pPr>
-            <a:lvl4pPr>
-              <a:defRPr sz="1200" b="0">
-                <a:solidFill>
-                  <a:srgbClr val="53616D"/>
-                </a:solidFill>
-                <a:latin typeface="Meiryo"/>
-                <a:ea typeface="Meiryo"/>
-                <a:cs typeface="Meiryo"/>
-              </a:defRPr>
-            </a:lvl4pPr>
-            <a:lvl5pPr>
-              <a:defRPr sz="1200" b="0">
-                <a:solidFill>
-                  <a:srgbClr val="53616D"/>
-                </a:solidFill>
-                <a:latin typeface="Meiryo"/>
-                <a:ea typeface="Meiryo"/>
-                <a:cs typeface="Meiryo"/>
-              </a:defRPr>
-            </a:lvl5pPr>
-            <a:lvl6pPr>
-              <a:defRPr sz="1200" b="0">
-                <a:solidFill>
-                  <a:srgbClr val="53616D"/>
-                </a:solidFill>
-                <a:latin typeface="Meiryo"/>
-                <a:ea typeface="Meiryo"/>
-                <a:cs typeface="Meiryo"/>
-              </a:defRPr>
-            </a:lvl6pPr>
-            <a:lvl7pPr>
-              <a:defRPr sz="1200" b="0">
-                <a:solidFill>
-                  <a:srgbClr val="53616D"/>
-                </a:solidFill>
-                <a:latin typeface="Meiryo"/>
-                <a:ea typeface="Meiryo"/>
-                <a:cs typeface="Meiryo"/>
-              </a:defRPr>
-            </a:lvl7pPr>
-            <a:lvl8pPr>
-              <a:defRPr sz="1200" b="0">
-                <a:solidFill>
-                  <a:srgbClr val="53616D"/>
-                </a:solidFill>
-                <a:latin typeface="Meiryo"/>
-                <a:ea typeface="Meiryo"/>
-                <a:cs typeface="Meiryo"/>
-              </a:defRPr>
-            </a:lvl8pPr>
-            <a:lvl9pPr>
-              <a:defRPr sz="1200" b="0">
-                <a:solidFill>
-                  <a:srgbClr val="53616D"/>
-                </a:solidFill>
-                <a:latin typeface="Meiryo"/>
-                <a:ea typeface="Meiryo"/>
-                <a:cs typeface="Meiryo"/>
-              </a:defRPr>
-            </a:lvl9pPr>
-          </a:lstStyle>
-          <a:p xmlns:a="http://schemas.openxmlformats.org/drawingml/2006/main">
-            <a:pPr>
-              <a:lnSpc>
-                <a:spcPct val="118000"/>
-              </a:lnSpc>
-              <a:buNone/>
-              <a:defRPr sz="1200" b="0">
-                <a:solidFill>
-                  <a:srgbClr val="53616D"/>
-                </a:solidFill>
-                <a:latin typeface="Meiryo"/>
-                <a:ea typeface="Meiryo"/>
-                <a:cs typeface="Meiryo"/>
-              </a:defRPr>
-            </a:pPr>
-            <a:r>
-              <a:rPr sz="1200" b="0">
-                <a:solidFill>
-                  <a:srgbClr val="53616D"/>
-                </a:solidFill>
-                <a:latin typeface="Meiryo"/>
-                <a:ea typeface="Meiryo"/>
-                <a:cs typeface="Meiryo"/>
-              </a:rPr>
-              <a:t>三色の分岐係 / 企画書</a:t>
-            </a:r>
-          </a:p>
-        </p:txBody>
-      </p:sp>
-      <p:sp>
-        <p:nvSpPr>
-          <p:cNvPr id="4" name="03 / 06">
-            <a:extLst xmlns:a="http://schemas.openxmlformats.org/drawingml/2006/main">
-              <a:ext uri="{FF2B5EF4-FFF2-40B4-BE49-F238E27FC236}">
-                <a16:creationId xmlns:a16="http://schemas.microsoft.com/office/drawing/2014/main" id="{97448CB5-B219-43D5-B6A5-D270C96E4070}"/>
-              </a:ext>
-            </a:extLst>
-          </p:cNvPr>
-          <p:cNvSpPr>
-            <a:spLocks xmlns:a="http://schemas.openxmlformats.org/drawingml/2006/main" noGrp="1"/>
-          </p:cNvSpPr>
-          <p:nvPr/>
-        </p:nvSpPr>
-        <p:spPr>
-          <a:xfrm xmlns:a="http://schemas.openxmlformats.org/drawingml/2006/main">
-            <a:off x="10668000" y="6448425"/>
-            <a:ext cx="952500" cy="247650"/>
-          </a:xfrm>
-          <a:prstGeom xmlns:a="http://schemas.openxmlformats.org/drawingml/2006/main" prst="rect">
-            <a:avLst/>
-          </a:prstGeom>
-          <a:noFill xmlns:a="http://schemas.openxmlformats.org/drawingml/2006/main"/>
-          <a:ln xmlns:a="http://schemas.openxmlformats.org/drawingml/2006/main" w="0">
-            <a:noFill/>
-          </a:ln>
-        </p:spPr>
-        <p:txBody>
-          <a:bodyPr xmlns:a="http://schemas.openxmlformats.org/drawingml/2006/main" wrap="square" lIns="0" tIns="0" rIns="0" bIns="0" anchor="t">
-            <a:noAutofit/>
-          </a:bodyPr>
-          <a:lstStyle xmlns:a="http://schemas.openxmlformats.org/drawingml/2006/main">
-            <a:defPPr>
-              <a:defRPr sz="1200" b="0">
-                <a:solidFill>
-                  <a:srgbClr val="53616D"/>
-                </a:solidFill>
-                <a:latin typeface="Meiryo"/>
-                <a:ea typeface="Meiryo"/>
-                <a:cs typeface="Meiryo"/>
-              </a:defRPr>
-            </a:defPPr>
-            <a:lvl1pPr>
-              <a:defRPr sz="1200" b="0">
-                <a:solidFill>
-                  <a:srgbClr val="53616D"/>
-                </a:solidFill>
-                <a:latin typeface="Meiryo"/>
-                <a:ea typeface="Meiryo"/>
-                <a:cs typeface="Meiryo"/>
-              </a:defRPr>
-            </a:lvl1pPr>
-            <a:lvl2pPr>
-              <a:defRPr sz="1200" b="0">
-                <a:solidFill>
-                  <a:srgbClr val="53616D"/>
-                </a:solidFill>
-                <a:latin typeface="Meiryo"/>
-                <a:ea typeface="Meiryo"/>
-                <a:cs typeface="Meiryo"/>
-              </a:defRPr>
-            </a:lvl2pPr>
-            <a:lvl3pPr>
-              <a:defRPr sz="1200" b="0">
-                <a:solidFill>
-                  <a:srgbClr val="53616D"/>
-                </a:solidFill>
-                <a:latin typeface="Meiryo"/>
-                <a:ea typeface="Meiryo"/>
-                <a:cs typeface="Meiryo"/>
-              </a:defRPr>
-            </a:lvl3pPr>
-            <a:lvl4pPr>
-              <a:defRPr sz="1200" b="0">
-                <a:solidFill>
-                  <a:srgbClr val="53616D"/>
-                </a:solidFill>
-                <a:latin typeface="Meiryo"/>
-                <a:ea typeface="Meiryo"/>
-                <a:cs typeface="Meiryo"/>
-              </a:defRPr>
-            </a:lvl4pPr>
-            <a:lvl5pPr>
-              <a:defRPr sz="1200" b="0">
-                <a:solidFill>
-                  <a:srgbClr val="53616D"/>
-                </a:solidFill>
-                <a:latin typeface="Meiryo"/>
-                <a:ea typeface="Meiryo"/>
-                <a:cs typeface="Meiryo"/>
-              </a:defRPr>
-            </a:lvl5pPr>
-            <a:lvl6pPr>
-              <a:defRPr sz="1200" b="0">
-                <a:solidFill>
-                  <a:srgbClr val="53616D"/>
-                </a:solidFill>
-                <a:latin typeface="Meiryo"/>
-                <a:ea typeface="Meiryo"/>
-                <a:cs typeface="Meiryo"/>
-              </a:defRPr>
-            </a:lvl6pPr>
-            <a:lvl7pPr>
-              <a:defRPr sz="1200" b="0">
-                <a:solidFill>
-                  <a:srgbClr val="53616D"/>
-                </a:solidFill>
-                <a:latin typeface="Meiryo"/>
-                <a:ea typeface="Meiryo"/>
-                <a:cs typeface="Meiryo"/>
-              </a:defRPr>
-            </a:lvl7pPr>
-            <a:lvl8pPr>
-              <a:defRPr sz="1200" b="0">
-                <a:solidFill>
-                  <a:srgbClr val="53616D"/>
-                </a:solidFill>
-                <a:latin typeface="Meiryo"/>
-                <a:ea typeface="Meiryo"/>
-                <a:cs typeface="Meiryo"/>
-              </a:defRPr>
-            </a:lvl8pPr>
-            <a:lvl9pPr>
-              <a:defRPr sz="1200" b="0">
-                <a:solidFill>
-                  <a:srgbClr val="53616D"/>
-                </a:solidFill>
-                <a:latin typeface="Meiryo"/>
-                <a:ea typeface="Meiryo"/>
-                <a:cs typeface="Meiryo"/>
-              </a:defRPr>
-            </a:lvl9pPr>
-          </a:lstStyle>
-          <a:p xmlns:a="http://schemas.openxmlformats.org/drawingml/2006/main">
-            <a:pPr>
-              <a:lnSpc>
-                <a:spcPct val="118000"/>
-              </a:lnSpc>
-              <a:buNone/>
-              <a:defRPr sz="1200" b="0">
-                <a:solidFill>
-                  <a:srgbClr val="53616D"/>
-                </a:solidFill>
-                <a:latin typeface="Meiryo"/>
-                <a:ea typeface="Meiryo"/>
-                <a:cs typeface="Meiryo"/>
-              </a:defRPr>
-            </a:pPr>
-            <a:r>
-              <a:rPr sz="1200" b="0">
-                <a:solidFill>
-                  <a:srgbClr val="53616D"/>
-                </a:solidFill>
-                <a:latin typeface="Meiryo"/>
-                <a:ea typeface="Meiryo"/>
-                <a:cs typeface="Meiryo"/>
-              </a:rPr>
-              <a:t>03 / 06</a:t>
-            </a:r>
-          </a:p>
-        </p:txBody>
-      </p:sp>
-      <p:pic>
-        <p:nvPicPr>
-          <p:cNvPr id="5" name="">
-            <a:extLst xmlns:a="http://schemas.openxmlformats.org/drawingml/2006/main">
-              <a:ext uri="{FF2B5EF4-FFF2-40B4-BE49-F238E27FC236}">
-                <a16:creationId xmlns:a16="http://schemas.microsoft.com/office/drawing/2014/main" id="{5C16AAD4-D9CA-4DE3-AF3A-5DD9E54C0259}"/>
+                <a16:creationId xmlns:a16="http://schemas.microsoft.com/office/drawing/2014/main" id="{891B9A43-CAC8-4210-B923-95B1014B6D84}"/>
               </a:ext>
             </a:extLst>
           </p:cNvPr>
@@ -7553,7 +6581,7 @@
           <p:nvPr/>
         </p:nvPicPr>
         <p:blipFill>
-          <a:blip xmlns:r="http://schemas.openxmlformats.org/officeDocument/2006/relationships" xmlns:a="http://schemas.openxmlformats.org/drawingml/2006/main" r:embed="R6c6cc2ed6a1444c4"/>
+          <a:blip xmlns:r="http://schemas.openxmlformats.org/officeDocument/2006/relationships" xmlns:a="http://schemas.openxmlformats.org/drawingml/2006/main" r:embed="R386c7190430f4bbf"/>
           <a:stretch xmlns:a="http://schemas.openxmlformats.org/drawingml/2006/main"/>
         </p:blipFill>
         <p:spPr>
@@ -7568,10 +6596,10 @@
       </p:pic>
       <p:pic>
         <p:nvPicPr>
-          <p:cNvPr id="6" name="">
+          <p:cNvPr id="4" name="">
             <a:extLst xmlns:a="http://schemas.openxmlformats.org/drawingml/2006/main">
               <a:ext uri="{FF2B5EF4-FFF2-40B4-BE49-F238E27FC236}">
-                <a16:creationId xmlns:a16="http://schemas.microsoft.com/office/drawing/2014/main" id="{22D9F6BA-D91D-401F-B113-28F310AAEE54}"/>
+                <a16:creationId xmlns:a16="http://schemas.microsoft.com/office/drawing/2014/main" id="{9CADFF59-CC77-4FE1-9E5C-C7350A89DF45}"/>
               </a:ext>
             </a:extLst>
           </p:cNvPr>
@@ -7581,7 +6609,7 @@
           <p:nvPr/>
         </p:nvPicPr>
         <p:blipFill>
-          <a:blip xmlns:r="http://schemas.openxmlformats.org/officeDocument/2006/relationships" xmlns:a="http://schemas.openxmlformats.org/drawingml/2006/main" r:embed="Rbe4bc08fa67e4871"/>
+          <a:blip xmlns:r="http://schemas.openxmlformats.org/officeDocument/2006/relationships" xmlns:a="http://schemas.openxmlformats.org/drawingml/2006/main" r:embed="R6ccf278096574e98"/>
           <a:stretch xmlns:a="http://schemas.openxmlformats.org/drawingml/2006/main"/>
         </p:blipFill>
         <p:spPr>
@@ -7596,10 +6624,10 @@
       </p:pic>
       <p:sp>
         <p:nvSpPr>
-          <p:cNvPr id="7" name="正常品">
+          <p:cNvPr id="5" name="正常品">
             <a:extLst xmlns:a="http://schemas.openxmlformats.org/drawingml/2006/main">
               <a:ext uri="{FF2B5EF4-FFF2-40B4-BE49-F238E27FC236}">
-                <a16:creationId xmlns:a16="http://schemas.microsoft.com/office/drawing/2014/main" id="{CF1988D6-7498-4473-B739-49FCFDB399CC}"/>
+                <a16:creationId xmlns:a16="http://schemas.microsoft.com/office/drawing/2014/main" id="{7A8D7D55-272F-4EDD-BDFC-B2476642D3BD}"/>
               </a:ext>
             </a:extLst>
           </p:cNvPr>
@@ -7758,10 +6786,10 @@
       </p:sp>
       <p:sp>
         <p:nvSpPr>
-          <p:cNvPr id="8" name="不良品">
+          <p:cNvPr id="6" name="不良品">
             <a:extLst xmlns:a="http://schemas.openxmlformats.org/drawingml/2006/main">
               <a:ext uri="{FF2B5EF4-FFF2-40B4-BE49-F238E27FC236}">
-                <a16:creationId xmlns:a16="http://schemas.microsoft.com/office/drawing/2014/main" id="{BDC24C3A-B64D-41F3-9037-12159E814ADA}"/>
+                <a16:creationId xmlns:a16="http://schemas.microsoft.com/office/drawing/2014/main" id="{F5DC1028-9428-4524-A4CD-A85ED228F578}"/>
               </a:ext>
             </a:extLst>
           </p:cNvPr>
@@ -7920,10 +6948,10 @@
       </p:sp>
       <p:sp>
         <p:nvSpPr>
-          <p:cNvPr id="9" name="形の違いを見落とさない">
+          <p:cNvPr id="7" name="形の違いを見落とさない">
             <a:extLst xmlns:a="http://schemas.openxmlformats.org/drawingml/2006/main">
               <a:ext uri="{FF2B5EF4-FFF2-40B4-BE49-F238E27FC236}">
-                <a16:creationId xmlns:a16="http://schemas.microsoft.com/office/drawing/2014/main" id="{E589F54A-FBFD-41C0-B487-5E7B949F973B}"/>
+                <a16:creationId xmlns:a16="http://schemas.microsoft.com/office/drawing/2014/main" id="{5EE5452C-D948-46E2-987A-AE09F8315100}"/>
               </a:ext>
             </a:extLst>
           </p:cNvPr>
@@ -8082,10 +7110,10 @@
       </p:sp>
       <p:sp>
         <p:nvSpPr>
-          <p:cNvPr id="10" name="「ロボットだから同じ方向」&#10;と決めつけるとミスになる。&#10;種類を判断したあ">
+          <p:cNvPr id="8" name="「ロボットだから同じ方向」&#10;と決めつけるとミスになる。&#10;種類を判断したあ">
             <a:extLst xmlns:a="http://schemas.openxmlformats.org/drawingml/2006/main">
               <a:ext uri="{FF2B5EF4-FFF2-40B4-BE49-F238E27FC236}">
-                <a16:creationId xmlns:a16="http://schemas.microsoft.com/office/drawing/2014/main" id="{08EB3273-4F02-476B-AA7F-79BBAF1AB723}"/>
+                <a16:creationId xmlns:a16="http://schemas.microsoft.com/office/drawing/2014/main" id="{402DFFB9-F27F-4A6B-AB77-C64F77EEED25}"/>
               </a:ext>
             </a:extLst>
           </p:cNvPr>
@@ -8325,10 +7353,10 @@
       </p:sp>
       <p:sp>
         <p:nvSpPr>
-          <p:cNvPr id="11" name="反射的な仕分けに「もう一度見る」判断を加え、単純作業にしない。">
+          <p:cNvPr id="9" name="反射的な仕分けに「もう一度見る」判断を加え、単純作業にしない。">
             <a:extLst xmlns:a="http://schemas.openxmlformats.org/drawingml/2006/main">
               <a:ext uri="{FF2B5EF4-FFF2-40B4-BE49-F238E27FC236}">
-                <a16:creationId xmlns:a16="http://schemas.microsoft.com/office/drawing/2014/main" id="{36EFC674-16DD-4B99-83BB-2252A693CB67}"/>
+                <a16:creationId xmlns:a16="http://schemas.microsoft.com/office/drawing/2014/main" id="{62EF36BD-2EF8-49B3-893E-E9E31E264997}"/>
               </a:ext>
             </a:extLst>
           </p:cNvPr>
@@ -8488,7 +7516,7 @@
     </p:spTree>
     <p:extLst>
       <p:ext uri="{BB962C8B-B14F-4D97-AF65-F5344CB8AC3E}">
-        <p14:creationId xmlns:p14="http://schemas.microsoft.com/office/powerpoint/2010/main" val="2028104577"/>
+        <p14:creationId xmlns:p14="http://schemas.microsoft.com/office/powerpoint/2010/main" val="1513767637"/>
       </p:ext>
     </p:extLst>
   </p:cSld>
@@ -8516,10 +7544,10 @@
       </p:grpSpPr>
       <p:sp>
         <p:nvSpPr>
-          <p:cNvPr id="11" name="三方向への仕分けと、上への返却">
+          <p:cNvPr id="9" name="三方向への仕分けと、上への返却">
             <a:extLst xmlns:a="http://schemas.openxmlformats.org/drawingml/2006/main">
               <a:ext uri="{FF2B5EF4-FFF2-40B4-BE49-F238E27FC236}">
-                <a16:creationId xmlns:a16="http://schemas.microsoft.com/office/drawing/2014/main" id="{7959BD36-F648-4280-8D7F-547D9349C8DB}"/>
+                <a16:creationId xmlns:a16="http://schemas.microsoft.com/office/drawing/2014/main" id="{AB43AAA2-1F74-4683-A70A-995A0D1F38D9}"/>
               </a:ext>
             </a:extLst>
           </p:cNvPr>
@@ -8681,7 +7709,7 @@
           <p:cNvPr id="2" name="キーの位置と、画面上の方向を対応させる">
             <a:extLst xmlns:a="http://schemas.openxmlformats.org/drawingml/2006/main">
               <a:ext uri="{FF2B5EF4-FFF2-40B4-BE49-F238E27FC236}">
-                <a16:creationId xmlns:a16="http://schemas.microsoft.com/office/drawing/2014/main" id="{82F51612-A4CC-4CEE-A42B-3B8865A5B967}"/>
+                <a16:creationId xmlns:a16="http://schemas.microsoft.com/office/drawing/2014/main" id="{2488BEE1-9090-457E-8345-BA7227843709}"/>
               </a:ext>
             </a:extLst>
           </p:cNvPr>
@@ -8838,336 +7866,12 @@
           </a:p>
         </p:txBody>
       </p:sp>
-      <p:sp>
-        <p:nvSpPr>
-          <p:cNvPr id="3" name="三色の分岐係 / 企画書">
+      <p:pic>
+        <p:nvPicPr>
+          <p:cNvPr id="3" name="">
             <a:extLst xmlns:a="http://schemas.openxmlformats.org/drawingml/2006/main">
               <a:ext uri="{FF2B5EF4-FFF2-40B4-BE49-F238E27FC236}">
-                <a16:creationId xmlns:a16="http://schemas.microsoft.com/office/drawing/2014/main" id="{5AFBD817-AD95-4B34-8DC6-CF459AFFD0C4}"/>
-              </a:ext>
-            </a:extLst>
-          </p:cNvPr>
-          <p:cNvSpPr>
-            <a:spLocks xmlns:a="http://schemas.openxmlformats.org/drawingml/2006/main" noGrp="1"/>
-          </p:cNvSpPr>
-          <p:nvPr/>
-        </p:nvSpPr>
-        <p:spPr>
-          <a:xfrm xmlns:a="http://schemas.openxmlformats.org/drawingml/2006/main">
-            <a:off x="609600" y="6448425"/>
-            <a:ext cx="9525000" cy="247650"/>
-          </a:xfrm>
-          <a:prstGeom xmlns:a="http://schemas.openxmlformats.org/drawingml/2006/main" prst="rect">
-            <a:avLst/>
-          </a:prstGeom>
-          <a:noFill xmlns:a="http://schemas.openxmlformats.org/drawingml/2006/main"/>
-          <a:ln xmlns:a="http://schemas.openxmlformats.org/drawingml/2006/main" w="0">
-            <a:noFill/>
-          </a:ln>
-        </p:spPr>
-        <p:txBody>
-          <a:bodyPr xmlns:a="http://schemas.openxmlformats.org/drawingml/2006/main" wrap="square" lIns="0" tIns="0" rIns="0" bIns="0" anchor="t">
-            <a:noAutofit/>
-          </a:bodyPr>
-          <a:lstStyle xmlns:a="http://schemas.openxmlformats.org/drawingml/2006/main">
-            <a:defPPr>
-              <a:defRPr sz="1200" b="0">
-                <a:solidFill>
-                  <a:srgbClr val="53616D"/>
-                </a:solidFill>
-                <a:latin typeface="Meiryo"/>
-                <a:ea typeface="Meiryo"/>
-                <a:cs typeface="Meiryo"/>
-              </a:defRPr>
-            </a:defPPr>
-            <a:lvl1pPr>
-              <a:defRPr sz="1200" b="0">
-                <a:solidFill>
-                  <a:srgbClr val="53616D"/>
-                </a:solidFill>
-                <a:latin typeface="Meiryo"/>
-                <a:ea typeface="Meiryo"/>
-                <a:cs typeface="Meiryo"/>
-              </a:defRPr>
-            </a:lvl1pPr>
-            <a:lvl2pPr>
-              <a:defRPr sz="1200" b="0">
-                <a:solidFill>
-                  <a:srgbClr val="53616D"/>
-                </a:solidFill>
-                <a:latin typeface="Meiryo"/>
-                <a:ea typeface="Meiryo"/>
-                <a:cs typeface="Meiryo"/>
-              </a:defRPr>
-            </a:lvl2pPr>
-            <a:lvl3pPr>
-              <a:defRPr sz="1200" b="0">
-                <a:solidFill>
-                  <a:srgbClr val="53616D"/>
-                </a:solidFill>
-                <a:latin typeface="Meiryo"/>
-                <a:ea typeface="Meiryo"/>
-                <a:cs typeface="Meiryo"/>
-              </a:defRPr>
-            </a:lvl3pPr>
-            <a:lvl4pPr>
-              <a:defRPr sz="1200" b="0">
-                <a:solidFill>
-                  <a:srgbClr val="53616D"/>
-                </a:solidFill>
-                <a:latin typeface="Meiryo"/>
-                <a:ea typeface="Meiryo"/>
-                <a:cs typeface="Meiryo"/>
-              </a:defRPr>
-            </a:lvl4pPr>
-            <a:lvl5pPr>
-              <a:defRPr sz="1200" b="0">
-                <a:solidFill>
-                  <a:srgbClr val="53616D"/>
-                </a:solidFill>
-                <a:latin typeface="Meiryo"/>
-                <a:ea typeface="Meiryo"/>
-                <a:cs typeface="Meiryo"/>
-              </a:defRPr>
-            </a:lvl5pPr>
-            <a:lvl6pPr>
-              <a:defRPr sz="1200" b="0">
-                <a:solidFill>
-                  <a:srgbClr val="53616D"/>
-                </a:solidFill>
-                <a:latin typeface="Meiryo"/>
-                <a:ea typeface="Meiryo"/>
-                <a:cs typeface="Meiryo"/>
-              </a:defRPr>
-            </a:lvl6pPr>
-            <a:lvl7pPr>
-              <a:defRPr sz="1200" b="0">
-                <a:solidFill>
-                  <a:srgbClr val="53616D"/>
-                </a:solidFill>
-                <a:latin typeface="Meiryo"/>
-                <a:ea typeface="Meiryo"/>
-                <a:cs typeface="Meiryo"/>
-              </a:defRPr>
-            </a:lvl7pPr>
-            <a:lvl8pPr>
-              <a:defRPr sz="1200" b="0">
-                <a:solidFill>
-                  <a:srgbClr val="53616D"/>
-                </a:solidFill>
-                <a:latin typeface="Meiryo"/>
-                <a:ea typeface="Meiryo"/>
-                <a:cs typeface="Meiryo"/>
-              </a:defRPr>
-            </a:lvl8pPr>
-            <a:lvl9pPr>
-              <a:defRPr sz="1200" b="0">
-                <a:solidFill>
-                  <a:srgbClr val="53616D"/>
-                </a:solidFill>
-                <a:latin typeface="Meiryo"/>
-                <a:ea typeface="Meiryo"/>
-                <a:cs typeface="Meiryo"/>
-              </a:defRPr>
-            </a:lvl9pPr>
-          </a:lstStyle>
-          <a:p xmlns:a="http://schemas.openxmlformats.org/drawingml/2006/main">
-            <a:pPr>
-              <a:lnSpc>
-                <a:spcPct val="118000"/>
-              </a:lnSpc>
-              <a:buNone/>
-              <a:defRPr sz="1200" b="0">
-                <a:solidFill>
-                  <a:srgbClr val="53616D"/>
-                </a:solidFill>
-                <a:latin typeface="Meiryo"/>
-                <a:ea typeface="Meiryo"/>
-                <a:cs typeface="Meiryo"/>
-              </a:defRPr>
-            </a:pPr>
-            <a:r>
-              <a:rPr sz="1200" b="0">
-                <a:solidFill>
-                  <a:srgbClr val="53616D"/>
-                </a:solidFill>
-                <a:latin typeface="Meiryo"/>
-                <a:ea typeface="Meiryo"/>
-                <a:cs typeface="Meiryo"/>
-              </a:rPr>
-              <a:t>三色の分岐係 / 企画書</a:t>
-            </a:r>
-          </a:p>
-        </p:txBody>
-      </p:sp>
-      <p:sp>
-        <p:nvSpPr>
-          <p:cNvPr id="4" name="04 / 06">
-            <a:extLst xmlns:a="http://schemas.openxmlformats.org/drawingml/2006/main">
-              <a:ext uri="{FF2B5EF4-FFF2-40B4-BE49-F238E27FC236}">
-                <a16:creationId xmlns:a16="http://schemas.microsoft.com/office/drawing/2014/main" id="{0E8D3A92-1B10-4591-89ED-ECAFA4389B66}"/>
-              </a:ext>
-            </a:extLst>
-          </p:cNvPr>
-          <p:cNvSpPr>
-            <a:spLocks xmlns:a="http://schemas.openxmlformats.org/drawingml/2006/main" noGrp="1"/>
-          </p:cNvSpPr>
-          <p:nvPr/>
-        </p:nvSpPr>
-        <p:spPr>
-          <a:xfrm xmlns:a="http://schemas.openxmlformats.org/drawingml/2006/main">
-            <a:off x="10668000" y="6448425"/>
-            <a:ext cx="952500" cy="247650"/>
-          </a:xfrm>
-          <a:prstGeom xmlns:a="http://schemas.openxmlformats.org/drawingml/2006/main" prst="rect">
-            <a:avLst/>
-          </a:prstGeom>
-          <a:noFill xmlns:a="http://schemas.openxmlformats.org/drawingml/2006/main"/>
-          <a:ln xmlns:a="http://schemas.openxmlformats.org/drawingml/2006/main" w="0">
-            <a:noFill/>
-          </a:ln>
-        </p:spPr>
-        <p:txBody>
-          <a:bodyPr xmlns:a="http://schemas.openxmlformats.org/drawingml/2006/main" wrap="square" lIns="0" tIns="0" rIns="0" bIns="0" anchor="t">
-            <a:noAutofit/>
-          </a:bodyPr>
-          <a:lstStyle xmlns:a="http://schemas.openxmlformats.org/drawingml/2006/main">
-            <a:defPPr>
-              <a:defRPr sz="1200" b="0">
-                <a:solidFill>
-                  <a:srgbClr val="53616D"/>
-                </a:solidFill>
-                <a:latin typeface="Meiryo"/>
-                <a:ea typeface="Meiryo"/>
-                <a:cs typeface="Meiryo"/>
-              </a:defRPr>
-            </a:defPPr>
-            <a:lvl1pPr>
-              <a:defRPr sz="1200" b="0">
-                <a:solidFill>
-                  <a:srgbClr val="53616D"/>
-                </a:solidFill>
-                <a:latin typeface="Meiryo"/>
-                <a:ea typeface="Meiryo"/>
-                <a:cs typeface="Meiryo"/>
-              </a:defRPr>
-            </a:lvl1pPr>
-            <a:lvl2pPr>
-              <a:defRPr sz="1200" b="0">
-                <a:solidFill>
-                  <a:srgbClr val="53616D"/>
-                </a:solidFill>
-                <a:latin typeface="Meiryo"/>
-                <a:ea typeface="Meiryo"/>
-                <a:cs typeface="Meiryo"/>
-              </a:defRPr>
-            </a:lvl2pPr>
-            <a:lvl3pPr>
-              <a:defRPr sz="1200" b="0">
-                <a:solidFill>
-                  <a:srgbClr val="53616D"/>
-                </a:solidFill>
-                <a:latin typeface="Meiryo"/>
-                <a:ea typeface="Meiryo"/>
-                <a:cs typeface="Meiryo"/>
-              </a:defRPr>
-            </a:lvl3pPr>
-            <a:lvl4pPr>
-              <a:defRPr sz="1200" b="0">
-                <a:solidFill>
-                  <a:srgbClr val="53616D"/>
-                </a:solidFill>
-                <a:latin typeface="Meiryo"/>
-                <a:ea typeface="Meiryo"/>
-                <a:cs typeface="Meiryo"/>
-              </a:defRPr>
-            </a:lvl4pPr>
-            <a:lvl5pPr>
-              <a:defRPr sz="1200" b="0">
-                <a:solidFill>
-                  <a:srgbClr val="53616D"/>
-                </a:solidFill>
-                <a:latin typeface="Meiryo"/>
-                <a:ea typeface="Meiryo"/>
-                <a:cs typeface="Meiryo"/>
-              </a:defRPr>
-            </a:lvl5pPr>
-            <a:lvl6pPr>
-              <a:defRPr sz="1200" b="0">
-                <a:solidFill>
-                  <a:srgbClr val="53616D"/>
-                </a:solidFill>
-                <a:latin typeface="Meiryo"/>
-                <a:ea typeface="Meiryo"/>
-                <a:cs typeface="Meiryo"/>
-              </a:defRPr>
-            </a:lvl6pPr>
-            <a:lvl7pPr>
-              <a:defRPr sz="1200" b="0">
-                <a:solidFill>
-                  <a:srgbClr val="53616D"/>
-                </a:solidFill>
-                <a:latin typeface="Meiryo"/>
-                <a:ea typeface="Meiryo"/>
-                <a:cs typeface="Meiryo"/>
-              </a:defRPr>
-            </a:lvl7pPr>
-            <a:lvl8pPr>
-              <a:defRPr sz="1200" b="0">
-                <a:solidFill>
-                  <a:srgbClr val="53616D"/>
-                </a:solidFill>
-                <a:latin typeface="Meiryo"/>
-                <a:ea typeface="Meiryo"/>
-                <a:cs typeface="Meiryo"/>
-              </a:defRPr>
-            </a:lvl8pPr>
-            <a:lvl9pPr>
-              <a:defRPr sz="1200" b="0">
-                <a:solidFill>
-                  <a:srgbClr val="53616D"/>
-                </a:solidFill>
-                <a:latin typeface="Meiryo"/>
-                <a:ea typeface="Meiryo"/>
-                <a:cs typeface="Meiryo"/>
-              </a:defRPr>
-            </a:lvl9pPr>
-          </a:lstStyle>
-          <a:p xmlns:a="http://schemas.openxmlformats.org/drawingml/2006/main">
-            <a:pPr>
-              <a:lnSpc>
-                <a:spcPct val="118000"/>
-              </a:lnSpc>
-              <a:buNone/>
-              <a:defRPr sz="1200" b="0">
-                <a:solidFill>
-                  <a:srgbClr val="53616D"/>
-                </a:solidFill>
-                <a:latin typeface="Meiryo"/>
-                <a:ea typeface="Meiryo"/>
-                <a:cs typeface="Meiryo"/>
-              </a:defRPr>
-            </a:pPr>
-            <a:r>
-              <a:rPr sz="1200" b="0">
-                <a:solidFill>
-                  <a:srgbClr val="53616D"/>
-                </a:solidFill>
-                <a:latin typeface="Meiryo"/>
-                <a:ea typeface="Meiryo"/>
-                <a:cs typeface="Meiryo"/>
-              </a:rPr>
-              <a:t>04 / 06</a:t>
-            </a:r>
-          </a:p>
-        </p:txBody>
-      </p:sp>
-      <p:pic>
-        <p:nvPicPr>
-          <p:cNvPr id="5" name="">
-            <a:extLst xmlns:a="http://schemas.openxmlformats.org/drawingml/2006/main">
-              <a:ext uri="{FF2B5EF4-FFF2-40B4-BE49-F238E27FC236}">
-                <a16:creationId xmlns:a16="http://schemas.microsoft.com/office/drawing/2014/main" id="{C34B9254-D797-4B4A-AF35-48C905E595F0}"/>
+                <a16:creationId xmlns:a16="http://schemas.microsoft.com/office/drawing/2014/main" id="{98D25C0B-B02D-4BA2-A381-E0776AAA4735}"/>
               </a:ext>
             </a:extLst>
           </p:cNvPr>
@@ -9177,7 +7881,7 @@
           <p:nvPr/>
         </p:nvPicPr>
         <p:blipFill>
-          <a:blip xmlns:r="http://schemas.openxmlformats.org/officeDocument/2006/relationships" xmlns:a="http://schemas.openxmlformats.org/drawingml/2006/main" r:embed="R46166db5f86b4048"/>
+          <a:blip xmlns:r="http://schemas.openxmlformats.org/officeDocument/2006/relationships" xmlns:a="http://schemas.openxmlformats.org/drawingml/2006/main" r:embed="R9be30d474c3c4d24"/>
           <a:stretch xmlns:a="http://schemas.openxmlformats.org/drawingml/2006/main"/>
         </p:blipFill>
         <p:spPr>
@@ -9192,10 +7896,10 @@
       </p:pic>
       <p:pic>
         <p:nvPicPr>
-          <p:cNvPr id="6" name="">
+          <p:cNvPr id="4" name="">
             <a:extLst xmlns:a="http://schemas.openxmlformats.org/drawingml/2006/main">
               <a:ext uri="{FF2B5EF4-FFF2-40B4-BE49-F238E27FC236}">
-                <a16:creationId xmlns:a16="http://schemas.microsoft.com/office/drawing/2014/main" id="{F41DE18A-07C7-4B65-AD63-ED44BA3490AB}"/>
+                <a16:creationId xmlns:a16="http://schemas.microsoft.com/office/drawing/2014/main" id="{74BBD119-ECB0-4F57-870C-8943533AFF4B}"/>
               </a:ext>
             </a:extLst>
           </p:cNvPr>
@@ -9205,7 +7909,7 @@
           <p:nvPr/>
         </p:nvPicPr>
         <p:blipFill>
-          <a:blip xmlns:r="http://schemas.openxmlformats.org/officeDocument/2006/relationships" xmlns:a="http://schemas.openxmlformats.org/drawingml/2006/main" r:embed="R25a62dfa351a4161"/>
+          <a:blip xmlns:r="http://schemas.openxmlformats.org/officeDocument/2006/relationships" xmlns:a="http://schemas.openxmlformats.org/drawingml/2006/main" r:embed="R221e4239f6114e74"/>
           <a:stretch xmlns:a="http://schemas.openxmlformats.org/drawingml/2006/main"/>
         </p:blipFill>
         <p:spPr>
@@ -9220,10 +7924,10 @@
       </p:pic>
       <p:sp>
         <p:nvSpPr>
-          <p:cNvPr id="7" name="正常品を三方向へ">
+          <p:cNvPr id="5" name="正常品を三方向へ">
             <a:extLst xmlns:a="http://schemas.openxmlformats.org/drawingml/2006/main">
               <a:ext uri="{FF2B5EF4-FFF2-40B4-BE49-F238E27FC236}">
-                <a16:creationId xmlns:a16="http://schemas.microsoft.com/office/drawing/2014/main" id="{958911C4-6990-49F4-8FF2-8EFAFDF2637C}"/>
+                <a16:creationId xmlns:a16="http://schemas.microsoft.com/office/drawing/2014/main" id="{3553E7E3-F965-45B5-9DCA-C8CB3EADA289}"/>
               </a:ext>
             </a:extLst>
           </p:cNvPr>
@@ -9382,10 +8086,10 @@
       </p:sp>
       <p:sp>
         <p:nvSpPr>
-          <p:cNvPr id="8" name="A・S・Dで左・下・右を選択。&#10;レーンの点灯で選んだ方向を確認できます。">
+          <p:cNvPr id="6" name="A・S・Dで左・下・右を選択。&#10;レーンの点灯で選んだ方向を確認できます。">
             <a:extLst xmlns:a="http://schemas.openxmlformats.org/drawingml/2006/main">
               <a:ext uri="{FF2B5EF4-FFF2-40B4-BE49-F238E27FC236}">
-                <a16:creationId xmlns:a16="http://schemas.microsoft.com/office/drawing/2014/main" id="{32F41B12-75D3-4D94-BFE8-E49C7557AF10}"/>
+                <a16:creationId xmlns:a16="http://schemas.microsoft.com/office/drawing/2014/main" id="{8B00FBBB-15CB-47C9-A049-A75CA298AE38}"/>
               </a:ext>
             </a:extLst>
           </p:cNvPr>
@@ -9571,10 +8275,10 @@
       </p:sp>
       <p:sp>
         <p:nvSpPr>
-          <p:cNvPr id="9" name="不良品は上へ">
+          <p:cNvPr id="7" name="不良品は上へ">
             <a:extLst xmlns:a="http://schemas.openxmlformats.org/drawingml/2006/main">
               <a:ext uri="{FF2B5EF4-FFF2-40B4-BE49-F238E27FC236}">
-                <a16:creationId xmlns:a16="http://schemas.microsoft.com/office/drawing/2014/main" id="{1BBD480A-0D8F-4D0A-9E4F-14005034B8C4}"/>
+                <a16:creationId xmlns:a16="http://schemas.microsoft.com/office/drawing/2014/main" id="{3B3BF9CF-0ECE-4155-8CB3-B3BE27E448C9}"/>
               </a:ext>
             </a:extLst>
           </p:cNvPr>
@@ -9733,10 +8437,10 @@
       </p:sp>
       <p:sp>
         <p:nvSpPr>
-          <p:cNvPr id="10" name="Wで返却。種類が合っていても、&#10;不良品を通常レーンへ送るとミスになります">
+          <p:cNvPr id="8" name="Wで返却。種類が合っていても、&#10;不良品を通常レーンへ送るとミスになります">
             <a:extLst xmlns:a="http://schemas.openxmlformats.org/drawingml/2006/main">
               <a:ext uri="{FF2B5EF4-FFF2-40B4-BE49-F238E27FC236}">
-                <a16:creationId xmlns:a16="http://schemas.microsoft.com/office/drawing/2014/main" id="{7601C90A-DFB3-4EC2-986E-F62CDF088CA9}"/>
+                <a16:creationId xmlns:a16="http://schemas.microsoft.com/office/drawing/2014/main" id="{7ED7419A-9471-4942-BC85-BD82A68805E5}"/>
               </a:ext>
             </a:extLst>
           </p:cNvPr>
@@ -9923,7 +8627,7 @@
     </p:spTree>
     <p:extLst>
       <p:ext uri="{BB962C8B-B14F-4D97-AF65-F5344CB8AC3E}">
-        <p14:creationId xmlns:p14="http://schemas.microsoft.com/office/powerpoint/2010/main" val="1569972956"/>
+        <p14:creationId xmlns:p14="http://schemas.microsoft.com/office/powerpoint/2010/main" val="1284601369"/>
       </p:ext>
     </p:extLst>
   </p:cSld>
@@ -9951,10 +8655,10 @@
       </p:grpSpPr>
       <p:sp>
         <p:nvSpPr>
-          <p:cNvPr id="12" name="結果がすぐ伝わる、スコアへの挑戦">
+          <p:cNvPr id="10" name="結果がすぐ伝わる、スコアへの挑戦">
             <a:extLst xmlns:a="http://schemas.openxmlformats.org/drawingml/2006/main">
               <a:ext uri="{FF2B5EF4-FFF2-40B4-BE49-F238E27FC236}">
-                <a16:creationId xmlns:a16="http://schemas.microsoft.com/office/drawing/2014/main" id="{A1105DC7-E3BE-43B6-B3A5-54A45E0010E1}"/>
+                <a16:creationId xmlns:a16="http://schemas.microsoft.com/office/drawing/2014/main" id="{FC965C4A-F609-40A2-9790-8DB1C6D2A5B4}"/>
               </a:ext>
             </a:extLst>
           </p:cNvPr>
@@ -10116,7 +8820,7 @@
           <p:cNvPr id="2" name="正解・不正解の演出で、次の判断につなげる">
             <a:extLst xmlns:a="http://schemas.openxmlformats.org/drawingml/2006/main">
               <a:ext uri="{FF2B5EF4-FFF2-40B4-BE49-F238E27FC236}">
-                <a16:creationId xmlns:a16="http://schemas.microsoft.com/office/drawing/2014/main" id="{BDFC80F9-968A-4D5A-ADAC-C55DEFFE593B}"/>
+                <a16:creationId xmlns:a16="http://schemas.microsoft.com/office/drawing/2014/main" id="{91E73008-23D9-4CA2-9BBF-48EF108F2D82}"/>
               </a:ext>
             </a:extLst>
           </p:cNvPr>
@@ -10273,336 +8977,12 @@
           </a:p>
         </p:txBody>
       </p:sp>
-      <p:sp>
-        <p:nvSpPr>
-          <p:cNvPr id="3" name="三色の分岐係 / 企画書">
+      <p:pic>
+        <p:nvPicPr>
+          <p:cNvPr id="3" name="">
             <a:extLst xmlns:a="http://schemas.openxmlformats.org/drawingml/2006/main">
               <a:ext uri="{FF2B5EF4-FFF2-40B4-BE49-F238E27FC236}">
-                <a16:creationId xmlns:a16="http://schemas.microsoft.com/office/drawing/2014/main" id="{2BA6EFAD-ABCA-4BC9-BD94-BB8C2EB58860}"/>
-              </a:ext>
-            </a:extLst>
-          </p:cNvPr>
-          <p:cNvSpPr>
-            <a:spLocks xmlns:a="http://schemas.openxmlformats.org/drawingml/2006/main" noGrp="1"/>
-          </p:cNvSpPr>
-          <p:nvPr/>
-        </p:nvSpPr>
-        <p:spPr>
-          <a:xfrm xmlns:a="http://schemas.openxmlformats.org/drawingml/2006/main">
-            <a:off x="609600" y="6448425"/>
-            <a:ext cx="9525000" cy="247650"/>
-          </a:xfrm>
-          <a:prstGeom xmlns:a="http://schemas.openxmlformats.org/drawingml/2006/main" prst="rect">
-            <a:avLst/>
-          </a:prstGeom>
-          <a:noFill xmlns:a="http://schemas.openxmlformats.org/drawingml/2006/main"/>
-          <a:ln xmlns:a="http://schemas.openxmlformats.org/drawingml/2006/main" w="0">
-            <a:noFill/>
-          </a:ln>
-        </p:spPr>
-        <p:txBody>
-          <a:bodyPr xmlns:a="http://schemas.openxmlformats.org/drawingml/2006/main" wrap="square" lIns="0" tIns="0" rIns="0" bIns="0" anchor="t">
-            <a:noAutofit/>
-          </a:bodyPr>
-          <a:lstStyle xmlns:a="http://schemas.openxmlformats.org/drawingml/2006/main">
-            <a:defPPr>
-              <a:defRPr sz="1200" b="0">
-                <a:solidFill>
-                  <a:srgbClr val="53616D"/>
-                </a:solidFill>
-                <a:latin typeface="Meiryo"/>
-                <a:ea typeface="Meiryo"/>
-                <a:cs typeface="Meiryo"/>
-              </a:defRPr>
-            </a:defPPr>
-            <a:lvl1pPr>
-              <a:defRPr sz="1200" b="0">
-                <a:solidFill>
-                  <a:srgbClr val="53616D"/>
-                </a:solidFill>
-                <a:latin typeface="Meiryo"/>
-                <a:ea typeface="Meiryo"/>
-                <a:cs typeface="Meiryo"/>
-              </a:defRPr>
-            </a:lvl1pPr>
-            <a:lvl2pPr>
-              <a:defRPr sz="1200" b="0">
-                <a:solidFill>
-                  <a:srgbClr val="53616D"/>
-                </a:solidFill>
-                <a:latin typeface="Meiryo"/>
-                <a:ea typeface="Meiryo"/>
-                <a:cs typeface="Meiryo"/>
-              </a:defRPr>
-            </a:lvl2pPr>
-            <a:lvl3pPr>
-              <a:defRPr sz="1200" b="0">
-                <a:solidFill>
-                  <a:srgbClr val="53616D"/>
-                </a:solidFill>
-                <a:latin typeface="Meiryo"/>
-                <a:ea typeface="Meiryo"/>
-                <a:cs typeface="Meiryo"/>
-              </a:defRPr>
-            </a:lvl3pPr>
-            <a:lvl4pPr>
-              <a:defRPr sz="1200" b="0">
-                <a:solidFill>
-                  <a:srgbClr val="53616D"/>
-                </a:solidFill>
-                <a:latin typeface="Meiryo"/>
-                <a:ea typeface="Meiryo"/>
-                <a:cs typeface="Meiryo"/>
-              </a:defRPr>
-            </a:lvl4pPr>
-            <a:lvl5pPr>
-              <a:defRPr sz="1200" b="0">
-                <a:solidFill>
-                  <a:srgbClr val="53616D"/>
-                </a:solidFill>
-                <a:latin typeface="Meiryo"/>
-                <a:ea typeface="Meiryo"/>
-                <a:cs typeface="Meiryo"/>
-              </a:defRPr>
-            </a:lvl5pPr>
-            <a:lvl6pPr>
-              <a:defRPr sz="1200" b="0">
-                <a:solidFill>
-                  <a:srgbClr val="53616D"/>
-                </a:solidFill>
-                <a:latin typeface="Meiryo"/>
-                <a:ea typeface="Meiryo"/>
-                <a:cs typeface="Meiryo"/>
-              </a:defRPr>
-            </a:lvl6pPr>
-            <a:lvl7pPr>
-              <a:defRPr sz="1200" b="0">
-                <a:solidFill>
-                  <a:srgbClr val="53616D"/>
-                </a:solidFill>
-                <a:latin typeface="Meiryo"/>
-                <a:ea typeface="Meiryo"/>
-                <a:cs typeface="Meiryo"/>
-              </a:defRPr>
-            </a:lvl7pPr>
-            <a:lvl8pPr>
-              <a:defRPr sz="1200" b="0">
-                <a:solidFill>
-                  <a:srgbClr val="53616D"/>
-                </a:solidFill>
-                <a:latin typeface="Meiryo"/>
-                <a:ea typeface="Meiryo"/>
-                <a:cs typeface="Meiryo"/>
-              </a:defRPr>
-            </a:lvl8pPr>
-            <a:lvl9pPr>
-              <a:defRPr sz="1200" b="0">
-                <a:solidFill>
-                  <a:srgbClr val="53616D"/>
-                </a:solidFill>
-                <a:latin typeface="Meiryo"/>
-                <a:ea typeface="Meiryo"/>
-                <a:cs typeface="Meiryo"/>
-              </a:defRPr>
-            </a:lvl9pPr>
-          </a:lstStyle>
-          <a:p xmlns:a="http://schemas.openxmlformats.org/drawingml/2006/main">
-            <a:pPr>
-              <a:lnSpc>
-                <a:spcPct val="118000"/>
-              </a:lnSpc>
-              <a:buNone/>
-              <a:defRPr sz="1200" b="0">
-                <a:solidFill>
-                  <a:srgbClr val="53616D"/>
-                </a:solidFill>
-                <a:latin typeface="Meiryo"/>
-                <a:ea typeface="Meiryo"/>
-                <a:cs typeface="Meiryo"/>
-              </a:defRPr>
-            </a:pPr>
-            <a:r>
-              <a:rPr sz="1200" b="0">
-                <a:solidFill>
-                  <a:srgbClr val="53616D"/>
-                </a:solidFill>
-                <a:latin typeface="Meiryo"/>
-                <a:ea typeface="Meiryo"/>
-                <a:cs typeface="Meiryo"/>
-              </a:rPr>
-              <a:t>三色の分岐係 / 企画書</a:t>
-            </a:r>
-          </a:p>
-        </p:txBody>
-      </p:sp>
-      <p:sp>
-        <p:nvSpPr>
-          <p:cNvPr id="4" name="05 / 06">
-            <a:extLst xmlns:a="http://schemas.openxmlformats.org/drawingml/2006/main">
-              <a:ext uri="{FF2B5EF4-FFF2-40B4-BE49-F238E27FC236}">
-                <a16:creationId xmlns:a16="http://schemas.microsoft.com/office/drawing/2014/main" id="{2C8E39AC-6513-48E5-9C89-9C0A78704BD8}"/>
-              </a:ext>
-            </a:extLst>
-          </p:cNvPr>
-          <p:cNvSpPr>
-            <a:spLocks xmlns:a="http://schemas.openxmlformats.org/drawingml/2006/main" noGrp="1"/>
-          </p:cNvSpPr>
-          <p:nvPr/>
-        </p:nvSpPr>
-        <p:spPr>
-          <a:xfrm xmlns:a="http://schemas.openxmlformats.org/drawingml/2006/main">
-            <a:off x="10668000" y="6448425"/>
-            <a:ext cx="952500" cy="247650"/>
-          </a:xfrm>
-          <a:prstGeom xmlns:a="http://schemas.openxmlformats.org/drawingml/2006/main" prst="rect">
-            <a:avLst/>
-          </a:prstGeom>
-          <a:noFill xmlns:a="http://schemas.openxmlformats.org/drawingml/2006/main"/>
-          <a:ln xmlns:a="http://schemas.openxmlformats.org/drawingml/2006/main" w="0">
-            <a:noFill/>
-          </a:ln>
-        </p:spPr>
-        <p:txBody>
-          <a:bodyPr xmlns:a="http://schemas.openxmlformats.org/drawingml/2006/main" wrap="square" lIns="0" tIns="0" rIns="0" bIns="0" anchor="t">
-            <a:noAutofit/>
-          </a:bodyPr>
-          <a:lstStyle xmlns:a="http://schemas.openxmlformats.org/drawingml/2006/main">
-            <a:defPPr>
-              <a:defRPr sz="1200" b="0">
-                <a:solidFill>
-                  <a:srgbClr val="53616D"/>
-                </a:solidFill>
-                <a:latin typeface="Meiryo"/>
-                <a:ea typeface="Meiryo"/>
-                <a:cs typeface="Meiryo"/>
-              </a:defRPr>
-            </a:defPPr>
-            <a:lvl1pPr>
-              <a:defRPr sz="1200" b="0">
-                <a:solidFill>
-                  <a:srgbClr val="53616D"/>
-                </a:solidFill>
-                <a:latin typeface="Meiryo"/>
-                <a:ea typeface="Meiryo"/>
-                <a:cs typeface="Meiryo"/>
-              </a:defRPr>
-            </a:lvl1pPr>
-            <a:lvl2pPr>
-              <a:defRPr sz="1200" b="0">
-                <a:solidFill>
-                  <a:srgbClr val="53616D"/>
-                </a:solidFill>
-                <a:latin typeface="Meiryo"/>
-                <a:ea typeface="Meiryo"/>
-                <a:cs typeface="Meiryo"/>
-              </a:defRPr>
-            </a:lvl2pPr>
-            <a:lvl3pPr>
-              <a:defRPr sz="1200" b="0">
-                <a:solidFill>
-                  <a:srgbClr val="53616D"/>
-                </a:solidFill>
-                <a:latin typeface="Meiryo"/>
-                <a:ea typeface="Meiryo"/>
-                <a:cs typeface="Meiryo"/>
-              </a:defRPr>
-            </a:lvl3pPr>
-            <a:lvl4pPr>
-              <a:defRPr sz="1200" b="0">
-                <a:solidFill>
-                  <a:srgbClr val="53616D"/>
-                </a:solidFill>
-                <a:latin typeface="Meiryo"/>
-                <a:ea typeface="Meiryo"/>
-                <a:cs typeface="Meiryo"/>
-              </a:defRPr>
-            </a:lvl4pPr>
-            <a:lvl5pPr>
-              <a:defRPr sz="1200" b="0">
-                <a:solidFill>
-                  <a:srgbClr val="53616D"/>
-                </a:solidFill>
-                <a:latin typeface="Meiryo"/>
-                <a:ea typeface="Meiryo"/>
-                <a:cs typeface="Meiryo"/>
-              </a:defRPr>
-            </a:lvl5pPr>
-            <a:lvl6pPr>
-              <a:defRPr sz="1200" b="0">
-                <a:solidFill>
-                  <a:srgbClr val="53616D"/>
-                </a:solidFill>
-                <a:latin typeface="Meiryo"/>
-                <a:ea typeface="Meiryo"/>
-                <a:cs typeface="Meiryo"/>
-              </a:defRPr>
-            </a:lvl6pPr>
-            <a:lvl7pPr>
-              <a:defRPr sz="1200" b="0">
-                <a:solidFill>
-                  <a:srgbClr val="53616D"/>
-                </a:solidFill>
-                <a:latin typeface="Meiryo"/>
-                <a:ea typeface="Meiryo"/>
-                <a:cs typeface="Meiryo"/>
-              </a:defRPr>
-            </a:lvl7pPr>
-            <a:lvl8pPr>
-              <a:defRPr sz="1200" b="0">
-                <a:solidFill>
-                  <a:srgbClr val="53616D"/>
-                </a:solidFill>
-                <a:latin typeface="Meiryo"/>
-                <a:ea typeface="Meiryo"/>
-                <a:cs typeface="Meiryo"/>
-              </a:defRPr>
-            </a:lvl8pPr>
-            <a:lvl9pPr>
-              <a:defRPr sz="1200" b="0">
-                <a:solidFill>
-                  <a:srgbClr val="53616D"/>
-                </a:solidFill>
-                <a:latin typeface="Meiryo"/>
-                <a:ea typeface="Meiryo"/>
-                <a:cs typeface="Meiryo"/>
-              </a:defRPr>
-            </a:lvl9pPr>
-          </a:lstStyle>
-          <a:p xmlns:a="http://schemas.openxmlformats.org/drawingml/2006/main">
-            <a:pPr>
-              <a:lnSpc>
-                <a:spcPct val="118000"/>
-              </a:lnSpc>
-              <a:buNone/>
-              <a:defRPr sz="1200" b="0">
-                <a:solidFill>
-                  <a:srgbClr val="53616D"/>
-                </a:solidFill>
-                <a:latin typeface="Meiryo"/>
-                <a:ea typeface="Meiryo"/>
-                <a:cs typeface="Meiryo"/>
-              </a:defRPr>
-            </a:pPr>
-            <a:r>
-              <a:rPr sz="1200" b="0">
-                <a:solidFill>
-                  <a:srgbClr val="53616D"/>
-                </a:solidFill>
-                <a:latin typeface="Meiryo"/>
-                <a:ea typeface="Meiryo"/>
-                <a:cs typeface="Meiryo"/>
-              </a:rPr>
-              <a:t>05 / 06</a:t>
-            </a:r>
-          </a:p>
-        </p:txBody>
-      </p:sp>
-      <p:pic>
-        <p:nvPicPr>
-          <p:cNvPr id="5" name="">
-            <a:extLst xmlns:a="http://schemas.openxmlformats.org/drawingml/2006/main">
-              <a:ext uri="{FF2B5EF4-FFF2-40B4-BE49-F238E27FC236}">
-                <a16:creationId xmlns:a16="http://schemas.microsoft.com/office/drawing/2014/main" id="{8E5C9951-886F-480E-AD00-558750A30918}"/>
+                <a16:creationId xmlns:a16="http://schemas.microsoft.com/office/drawing/2014/main" id="{A69C7E73-8704-4029-BA6A-34384C83EC0F}"/>
               </a:ext>
             </a:extLst>
           </p:cNvPr>
@@ -10612,7 +8992,7 @@
           <p:nvPr/>
         </p:nvPicPr>
         <p:blipFill>
-          <a:blip xmlns:r="http://schemas.openxmlformats.org/officeDocument/2006/relationships" xmlns:a="http://schemas.openxmlformats.org/drawingml/2006/main" r:embed="R813312b5c9054ed5"/>
+          <a:blip xmlns:r="http://schemas.openxmlformats.org/officeDocument/2006/relationships" xmlns:a="http://schemas.openxmlformats.org/drawingml/2006/main" r:embed="R4c724bc3e9db480e"/>
           <a:stretch xmlns:a="http://schemas.openxmlformats.org/drawingml/2006/main"/>
         </p:blipFill>
         <p:spPr>
@@ -10627,10 +9007,10 @@
       </p:pic>
       <p:sp>
         <p:nvSpPr>
-          <p:cNvPr id="6" name="あと何回間違えられるか">
+          <p:cNvPr id="4" name="あと何回間違えられるか">
             <a:extLst xmlns:a="http://schemas.openxmlformats.org/drawingml/2006/main">
               <a:ext uri="{FF2B5EF4-FFF2-40B4-BE49-F238E27FC236}">
-                <a16:creationId xmlns:a16="http://schemas.microsoft.com/office/drawing/2014/main" id="{8568A36E-824F-41A1-B2B3-BD72220CABEA}"/>
+                <a16:creationId xmlns:a16="http://schemas.microsoft.com/office/drawing/2014/main" id="{73B4D65B-5110-47FE-BF91-96E48FA3D03F}"/>
               </a:ext>
             </a:extLst>
           </p:cNvPr>
@@ -10789,10 +9169,10 @@
       </p:sp>
       <p:sp>
         <p:nvSpPr>
-          <p:cNvPr id="7" name="ミスはランプで可視化。&#10;5回ミスするまでに、&#10;どこまでスコアを伸ばせるか">
+          <p:cNvPr id="5" name="ミスはランプで可視化。&#10;5回ミスするまでに、&#10;どこまでスコアを伸ばせるか">
             <a:extLst xmlns:a="http://schemas.openxmlformats.org/drawingml/2006/main">
               <a:ext uri="{FF2B5EF4-FFF2-40B4-BE49-F238E27FC236}">
-                <a16:creationId xmlns:a16="http://schemas.microsoft.com/office/drawing/2014/main" id="{3A993E97-D1D7-46C0-8883-BD7B6E708496}"/>
+                <a16:creationId xmlns:a16="http://schemas.microsoft.com/office/drawing/2014/main" id="{B6CD7E67-CC26-4423-8D66-26EA99A74EEA}"/>
               </a:ext>
             </a:extLst>
           </p:cNvPr>
@@ -11005,10 +9385,10 @@
       </p:sp>
       <p:sp>
         <p:nvSpPr>
-          <p:cNvPr id="8" name="成功と失敗の手応え">
+          <p:cNvPr id="6" name="成功と失敗の手応え">
             <a:extLst xmlns:a="http://schemas.openxmlformats.org/drawingml/2006/main">
               <a:ext uri="{FF2B5EF4-FFF2-40B4-BE49-F238E27FC236}">
-                <a16:creationId xmlns:a16="http://schemas.microsoft.com/office/drawing/2014/main" id="{E3286339-0E03-4DC9-B22A-AB7B27145B0B}"/>
+                <a16:creationId xmlns:a16="http://schemas.microsoft.com/office/drawing/2014/main" id="{33654048-F882-463E-AE78-0057BF99836E}"/>
               </a:ext>
             </a:extLst>
           </p:cNvPr>
@@ -11167,10 +9547,10 @@
       </p:sp>
       <p:sp>
         <p:nvSpPr>
-          <p:cNvPr id="9" name="音と表示で結果をその場で確認。&#10;間違えた品物の見方を修正し、&#10;次の仕分け">
+          <p:cNvPr id="7" name="音と表示で結果をその場で確認。&#10;間違えた品物の見方を修正し、&#10;次の仕分け">
             <a:extLst xmlns:a="http://schemas.openxmlformats.org/drawingml/2006/main">
               <a:ext uri="{FF2B5EF4-FFF2-40B4-BE49-F238E27FC236}">
-                <a16:creationId xmlns:a16="http://schemas.microsoft.com/office/drawing/2014/main" id="{DCD78E94-F1FE-4543-9A18-AF0FDC89924B}"/>
+                <a16:creationId xmlns:a16="http://schemas.microsoft.com/office/drawing/2014/main" id="{180506C2-02AF-4281-8D4F-3E2B16FCD808}"/>
               </a:ext>
             </a:extLst>
           </p:cNvPr>
@@ -11383,10 +9763,10 @@
       </p:sp>
       <p:sp>
         <p:nvSpPr>
-          <p:cNvPr id="10" name="工場らしい見た目">
+          <p:cNvPr id="8" name="工場らしい見た目">
             <a:extLst xmlns:a="http://schemas.openxmlformats.org/drawingml/2006/main">
               <a:ext uri="{FF2B5EF4-FFF2-40B4-BE49-F238E27FC236}">
-                <a16:creationId xmlns:a16="http://schemas.microsoft.com/office/drawing/2014/main" id="{98B3492D-DE6F-460C-A771-5AF7B2E4022C}"/>
+                <a16:creationId xmlns:a16="http://schemas.microsoft.com/office/drawing/2014/main" id="{75832789-1E52-4EFD-BA27-5B9A761DD96F}"/>
               </a:ext>
             </a:extLst>
           </p:cNvPr>
@@ -11545,10 +9925,10 @@
       </p:sp>
       <p:sp>
         <p:nvSpPr>
-          <p:cNvPr id="11" name="ベルトコンベア、操作卓、作業員を配置。&#10;分岐の点灯と作業員の動きで、&#10;自">
+          <p:cNvPr id="9" name="ベルトコンベア、操作卓、作業員を配置。&#10;分岐の点灯と作業員の動きで、&#10;自">
             <a:extLst xmlns:a="http://schemas.openxmlformats.org/drawingml/2006/main">
               <a:ext uri="{FF2B5EF4-FFF2-40B4-BE49-F238E27FC236}">
-                <a16:creationId xmlns:a16="http://schemas.microsoft.com/office/drawing/2014/main" id="{92AAEE82-7A08-4C61-9C44-117A457E88FB}"/>
+                <a16:creationId xmlns:a16="http://schemas.microsoft.com/office/drawing/2014/main" id="{71823CC0-1B31-42FF-AA1A-E466F66B24C2}"/>
               </a:ext>
             </a:extLst>
           </p:cNvPr>
@@ -11762,7 +10142,7 @@
     </p:spTree>
     <p:extLst>
       <p:ext uri="{BB962C8B-B14F-4D97-AF65-F5344CB8AC3E}">
-        <p14:creationId xmlns:p14="http://schemas.microsoft.com/office/powerpoint/2010/main" val="658716676"/>
+        <p14:creationId xmlns:p14="http://schemas.microsoft.com/office/powerpoint/2010/main" val="1798657018"/>
       </p:ext>
     </p:extLst>
   </p:cSld>
@@ -11790,10 +10170,10 @@
       </p:grpSpPr>
       <p:sp>
         <p:nvSpPr>
-          <p:cNvPr id="11" name="制作体制と公開先">
+          <p:cNvPr id="9" name="制作体制と公開先">
             <a:extLst xmlns:a="http://schemas.openxmlformats.org/drawingml/2006/main">
               <a:ext uri="{FF2B5EF4-FFF2-40B4-BE49-F238E27FC236}">
-                <a16:creationId xmlns:a16="http://schemas.microsoft.com/office/drawing/2014/main" id="{C49C6D25-021D-4077-ADC2-7F7E573383A5}"/>
+                <a16:creationId xmlns:a16="http://schemas.microsoft.com/office/drawing/2014/main" id="{167A79A8-F186-49C9-A404-3E6E3DF1091C}"/>
               </a:ext>
             </a:extLst>
           </p:cNvPr>
@@ -11955,7 +10335,7 @@
           <p:cNvPr id="2" name="制作人数：5人 / 開発環境：Unity 6 / PCブラウザー">
             <a:extLst xmlns:a="http://schemas.openxmlformats.org/drawingml/2006/main">
               <a:ext uri="{FF2B5EF4-FFF2-40B4-BE49-F238E27FC236}">
-                <a16:creationId xmlns:a16="http://schemas.microsoft.com/office/drawing/2014/main" id="{66CB26AA-2D72-4F4A-8EA3-7868FA9A7C13}"/>
+                <a16:creationId xmlns:a16="http://schemas.microsoft.com/office/drawing/2014/main" id="{335A335D-C29B-4EAA-948A-7D48E21DC8B8}"/>
               </a:ext>
             </a:extLst>
           </p:cNvPr>
@@ -12112,336 +10492,12 @@
           </a:p>
         </p:txBody>
       </p:sp>
-      <p:sp>
-        <p:nvSpPr>
-          <p:cNvPr id="3" name="三色の分岐係 / 企画書">
+      <p:pic>
+        <p:nvPicPr>
+          <p:cNvPr id="3" name="">
             <a:extLst xmlns:a="http://schemas.openxmlformats.org/drawingml/2006/main">
               <a:ext uri="{FF2B5EF4-FFF2-40B4-BE49-F238E27FC236}">
-                <a16:creationId xmlns:a16="http://schemas.microsoft.com/office/drawing/2014/main" id="{3EF1791B-96DD-420D-AA03-E5EE8E44BF0F}"/>
-              </a:ext>
-            </a:extLst>
-          </p:cNvPr>
-          <p:cNvSpPr>
-            <a:spLocks xmlns:a="http://schemas.openxmlformats.org/drawingml/2006/main" noGrp="1"/>
-          </p:cNvSpPr>
-          <p:nvPr/>
-        </p:nvSpPr>
-        <p:spPr>
-          <a:xfrm xmlns:a="http://schemas.openxmlformats.org/drawingml/2006/main">
-            <a:off x="609600" y="6448425"/>
-            <a:ext cx="9525000" cy="247650"/>
-          </a:xfrm>
-          <a:prstGeom xmlns:a="http://schemas.openxmlformats.org/drawingml/2006/main" prst="rect">
-            <a:avLst/>
-          </a:prstGeom>
-          <a:noFill xmlns:a="http://schemas.openxmlformats.org/drawingml/2006/main"/>
-          <a:ln xmlns:a="http://schemas.openxmlformats.org/drawingml/2006/main" w="0">
-            <a:noFill/>
-          </a:ln>
-        </p:spPr>
-        <p:txBody>
-          <a:bodyPr xmlns:a="http://schemas.openxmlformats.org/drawingml/2006/main" wrap="square" lIns="0" tIns="0" rIns="0" bIns="0" anchor="t">
-            <a:noAutofit/>
-          </a:bodyPr>
-          <a:lstStyle xmlns:a="http://schemas.openxmlformats.org/drawingml/2006/main">
-            <a:defPPr>
-              <a:defRPr sz="1200" b="0">
-                <a:solidFill>
-                  <a:srgbClr val="53616D"/>
-                </a:solidFill>
-                <a:latin typeface="Meiryo"/>
-                <a:ea typeface="Meiryo"/>
-                <a:cs typeface="Meiryo"/>
-              </a:defRPr>
-            </a:defPPr>
-            <a:lvl1pPr>
-              <a:defRPr sz="1200" b="0">
-                <a:solidFill>
-                  <a:srgbClr val="53616D"/>
-                </a:solidFill>
-                <a:latin typeface="Meiryo"/>
-                <a:ea typeface="Meiryo"/>
-                <a:cs typeface="Meiryo"/>
-              </a:defRPr>
-            </a:lvl1pPr>
-            <a:lvl2pPr>
-              <a:defRPr sz="1200" b="0">
-                <a:solidFill>
-                  <a:srgbClr val="53616D"/>
-                </a:solidFill>
-                <a:latin typeface="Meiryo"/>
-                <a:ea typeface="Meiryo"/>
-                <a:cs typeface="Meiryo"/>
-              </a:defRPr>
-            </a:lvl2pPr>
-            <a:lvl3pPr>
-              <a:defRPr sz="1200" b="0">
-                <a:solidFill>
-                  <a:srgbClr val="53616D"/>
-                </a:solidFill>
-                <a:latin typeface="Meiryo"/>
-                <a:ea typeface="Meiryo"/>
-                <a:cs typeface="Meiryo"/>
-              </a:defRPr>
-            </a:lvl3pPr>
-            <a:lvl4pPr>
-              <a:defRPr sz="1200" b="0">
-                <a:solidFill>
-                  <a:srgbClr val="53616D"/>
-                </a:solidFill>
-                <a:latin typeface="Meiryo"/>
-                <a:ea typeface="Meiryo"/>
-                <a:cs typeface="Meiryo"/>
-              </a:defRPr>
-            </a:lvl4pPr>
-            <a:lvl5pPr>
-              <a:defRPr sz="1200" b="0">
-                <a:solidFill>
-                  <a:srgbClr val="53616D"/>
-                </a:solidFill>
-                <a:latin typeface="Meiryo"/>
-                <a:ea typeface="Meiryo"/>
-                <a:cs typeface="Meiryo"/>
-              </a:defRPr>
-            </a:lvl5pPr>
-            <a:lvl6pPr>
-              <a:defRPr sz="1200" b="0">
-                <a:solidFill>
-                  <a:srgbClr val="53616D"/>
-                </a:solidFill>
-                <a:latin typeface="Meiryo"/>
-                <a:ea typeface="Meiryo"/>
-                <a:cs typeface="Meiryo"/>
-              </a:defRPr>
-            </a:lvl6pPr>
-            <a:lvl7pPr>
-              <a:defRPr sz="1200" b="0">
-                <a:solidFill>
-                  <a:srgbClr val="53616D"/>
-                </a:solidFill>
-                <a:latin typeface="Meiryo"/>
-                <a:ea typeface="Meiryo"/>
-                <a:cs typeface="Meiryo"/>
-              </a:defRPr>
-            </a:lvl7pPr>
-            <a:lvl8pPr>
-              <a:defRPr sz="1200" b="0">
-                <a:solidFill>
-                  <a:srgbClr val="53616D"/>
-                </a:solidFill>
-                <a:latin typeface="Meiryo"/>
-                <a:ea typeface="Meiryo"/>
-                <a:cs typeface="Meiryo"/>
-              </a:defRPr>
-            </a:lvl8pPr>
-            <a:lvl9pPr>
-              <a:defRPr sz="1200" b="0">
-                <a:solidFill>
-                  <a:srgbClr val="53616D"/>
-                </a:solidFill>
-                <a:latin typeface="Meiryo"/>
-                <a:ea typeface="Meiryo"/>
-                <a:cs typeface="Meiryo"/>
-              </a:defRPr>
-            </a:lvl9pPr>
-          </a:lstStyle>
-          <a:p xmlns:a="http://schemas.openxmlformats.org/drawingml/2006/main">
-            <a:pPr>
-              <a:lnSpc>
-                <a:spcPct val="118000"/>
-              </a:lnSpc>
-              <a:buNone/>
-              <a:defRPr sz="1200" b="0">
-                <a:solidFill>
-                  <a:srgbClr val="53616D"/>
-                </a:solidFill>
-                <a:latin typeface="Meiryo"/>
-                <a:ea typeface="Meiryo"/>
-                <a:cs typeface="Meiryo"/>
-              </a:defRPr>
-            </a:pPr>
-            <a:r>
-              <a:rPr sz="1200" b="0">
-                <a:solidFill>
-                  <a:srgbClr val="53616D"/>
-                </a:solidFill>
-                <a:latin typeface="Meiryo"/>
-                <a:ea typeface="Meiryo"/>
-                <a:cs typeface="Meiryo"/>
-              </a:rPr>
-              <a:t>三色の分岐係 / 企画書</a:t>
-            </a:r>
-          </a:p>
-        </p:txBody>
-      </p:sp>
-      <p:sp>
-        <p:nvSpPr>
-          <p:cNvPr id="4" name="06 / 06">
-            <a:extLst xmlns:a="http://schemas.openxmlformats.org/drawingml/2006/main">
-              <a:ext uri="{FF2B5EF4-FFF2-40B4-BE49-F238E27FC236}">
-                <a16:creationId xmlns:a16="http://schemas.microsoft.com/office/drawing/2014/main" id="{91C88C86-5918-487A-9AB3-9175C6C1C17F}"/>
-              </a:ext>
-            </a:extLst>
-          </p:cNvPr>
-          <p:cNvSpPr>
-            <a:spLocks xmlns:a="http://schemas.openxmlformats.org/drawingml/2006/main" noGrp="1"/>
-          </p:cNvSpPr>
-          <p:nvPr/>
-        </p:nvSpPr>
-        <p:spPr>
-          <a:xfrm xmlns:a="http://schemas.openxmlformats.org/drawingml/2006/main">
-            <a:off x="10668000" y="6448425"/>
-            <a:ext cx="952500" cy="247650"/>
-          </a:xfrm>
-          <a:prstGeom xmlns:a="http://schemas.openxmlformats.org/drawingml/2006/main" prst="rect">
-            <a:avLst/>
-          </a:prstGeom>
-          <a:noFill xmlns:a="http://schemas.openxmlformats.org/drawingml/2006/main"/>
-          <a:ln xmlns:a="http://schemas.openxmlformats.org/drawingml/2006/main" w="0">
-            <a:noFill/>
-          </a:ln>
-        </p:spPr>
-        <p:txBody>
-          <a:bodyPr xmlns:a="http://schemas.openxmlformats.org/drawingml/2006/main" wrap="square" lIns="0" tIns="0" rIns="0" bIns="0" anchor="t">
-            <a:noAutofit/>
-          </a:bodyPr>
-          <a:lstStyle xmlns:a="http://schemas.openxmlformats.org/drawingml/2006/main">
-            <a:defPPr>
-              <a:defRPr sz="1200" b="0">
-                <a:solidFill>
-                  <a:srgbClr val="53616D"/>
-                </a:solidFill>
-                <a:latin typeface="Meiryo"/>
-                <a:ea typeface="Meiryo"/>
-                <a:cs typeface="Meiryo"/>
-              </a:defRPr>
-            </a:defPPr>
-            <a:lvl1pPr>
-              <a:defRPr sz="1200" b="0">
-                <a:solidFill>
-                  <a:srgbClr val="53616D"/>
-                </a:solidFill>
-                <a:latin typeface="Meiryo"/>
-                <a:ea typeface="Meiryo"/>
-                <a:cs typeface="Meiryo"/>
-              </a:defRPr>
-            </a:lvl1pPr>
-            <a:lvl2pPr>
-              <a:defRPr sz="1200" b="0">
-                <a:solidFill>
-                  <a:srgbClr val="53616D"/>
-                </a:solidFill>
-                <a:latin typeface="Meiryo"/>
-                <a:ea typeface="Meiryo"/>
-                <a:cs typeface="Meiryo"/>
-              </a:defRPr>
-            </a:lvl2pPr>
-            <a:lvl3pPr>
-              <a:defRPr sz="1200" b="0">
-                <a:solidFill>
-                  <a:srgbClr val="53616D"/>
-                </a:solidFill>
-                <a:latin typeface="Meiryo"/>
-                <a:ea typeface="Meiryo"/>
-                <a:cs typeface="Meiryo"/>
-              </a:defRPr>
-            </a:lvl3pPr>
-            <a:lvl4pPr>
-              <a:defRPr sz="1200" b="0">
-                <a:solidFill>
-                  <a:srgbClr val="53616D"/>
-                </a:solidFill>
-                <a:latin typeface="Meiryo"/>
-                <a:ea typeface="Meiryo"/>
-                <a:cs typeface="Meiryo"/>
-              </a:defRPr>
-            </a:lvl4pPr>
-            <a:lvl5pPr>
-              <a:defRPr sz="1200" b="0">
-                <a:solidFill>
-                  <a:srgbClr val="53616D"/>
-                </a:solidFill>
-                <a:latin typeface="Meiryo"/>
-                <a:ea typeface="Meiryo"/>
-                <a:cs typeface="Meiryo"/>
-              </a:defRPr>
-            </a:lvl5pPr>
-            <a:lvl6pPr>
-              <a:defRPr sz="1200" b="0">
-                <a:solidFill>
-                  <a:srgbClr val="53616D"/>
-                </a:solidFill>
-                <a:latin typeface="Meiryo"/>
-                <a:ea typeface="Meiryo"/>
-                <a:cs typeface="Meiryo"/>
-              </a:defRPr>
-            </a:lvl6pPr>
-            <a:lvl7pPr>
-              <a:defRPr sz="1200" b="0">
-                <a:solidFill>
-                  <a:srgbClr val="53616D"/>
-                </a:solidFill>
-                <a:latin typeface="Meiryo"/>
-                <a:ea typeface="Meiryo"/>
-                <a:cs typeface="Meiryo"/>
-              </a:defRPr>
-            </a:lvl7pPr>
-            <a:lvl8pPr>
-              <a:defRPr sz="1200" b="0">
-                <a:solidFill>
-                  <a:srgbClr val="53616D"/>
-                </a:solidFill>
-                <a:latin typeface="Meiryo"/>
-                <a:ea typeface="Meiryo"/>
-                <a:cs typeface="Meiryo"/>
-              </a:defRPr>
-            </a:lvl8pPr>
-            <a:lvl9pPr>
-              <a:defRPr sz="1200" b="0">
-                <a:solidFill>
-                  <a:srgbClr val="53616D"/>
-                </a:solidFill>
-                <a:latin typeface="Meiryo"/>
-                <a:ea typeface="Meiryo"/>
-                <a:cs typeface="Meiryo"/>
-              </a:defRPr>
-            </a:lvl9pPr>
-          </a:lstStyle>
-          <a:p xmlns:a="http://schemas.openxmlformats.org/drawingml/2006/main">
-            <a:pPr>
-              <a:lnSpc>
-                <a:spcPct val="118000"/>
-              </a:lnSpc>
-              <a:buNone/>
-              <a:defRPr sz="1200" b="0">
-                <a:solidFill>
-                  <a:srgbClr val="53616D"/>
-                </a:solidFill>
-                <a:latin typeface="Meiryo"/>
-                <a:ea typeface="Meiryo"/>
-                <a:cs typeface="Meiryo"/>
-              </a:defRPr>
-            </a:pPr>
-            <a:r>
-              <a:rPr sz="1200" b="0">
-                <a:solidFill>
-                  <a:srgbClr val="53616D"/>
-                </a:solidFill>
-                <a:latin typeface="Meiryo"/>
-                <a:ea typeface="Meiryo"/>
-                <a:cs typeface="Meiryo"/>
-              </a:rPr>
-              <a:t>06 / 06</a:t>
-            </a:r>
-          </a:p>
-        </p:txBody>
-      </p:sp>
-      <p:pic>
-        <p:nvPicPr>
-          <p:cNvPr id="5" name="">
-            <a:extLst xmlns:a="http://schemas.openxmlformats.org/drawingml/2006/main">
-              <a:ext uri="{FF2B5EF4-FFF2-40B4-BE49-F238E27FC236}">
-                <a16:creationId xmlns:a16="http://schemas.microsoft.com/office/drawing/2014/main" id="{383E2350-A546-496F-8C2C-38D399B65822}"/>
+                <a16:creationId xmlns:a16="http://schemas.microsoft.com/office/drawing/2014/main" id="{FCF96984-2002-4A0F-87BD-5AF59186EE61}"/>
               </a:ext>
             </a:extLst>
           </p:cNvPr>
@@ -12451,7 +10507,7 @@
           <p:nvPr/>
         </p:nvPicPr>
         <p:blipFill>
-          <a:blip xmlns:r="http://schemas.openxmlformats.org/officeDocument/2006/relationships" xmlns:a="http://schemas.openxmlformats.org/drawingml/2006/main" r:embed="Rc24fcc6f43c24151"/>
+          <a:blip xmlns:r="http://schemas.openxmlformats.org/officeDocument/2006/relationships" xmlns:a="http://schemas.openxmlformats.org/drawingml/2006/main" r:embed="R03faa02bc3764b53"/>
           <a:stretch xmlns:a="http://schemas.openxmlformats.org/drawingml/2006/main"/>
         </p:blipFill>
         <p:spPr>
@@ -12466,10 +10522,10 @@
       </p:pic>
       <p:sp>
         <p:nvSpPr>
-          <p:cNvPr id="6" name="私の担当">
+          <p:cNvPr id="4" name="私の担当">
             <a:extLst xmlns:a="http://schemas.openxmlformats.org/drawingml/2006/main">
               <a:ext uri="{FF2B5EF4-FFF2-40B4-BE49-F238E27FC236}">
-                <a16:creationId xmlns:a16="http://schemas.microsoft.com/office/drawing/2014/main" id="{6E5D6EE2-C953-405F-AAF3-5CF56F46A747}"/>
+                <a16:creationId xmlns:a16="http://schemas.microsoft.com/office/drawing/2014/main" id="{7D80A76C-683F-45CF-AD8F-C51A22193980}"/>
               </a:ext>
             </a:extLst>
           </p:cNvPr>
@@ -12628,10 +10684,10 @@
       </p:sp>
       <p:sp>
         <p:nvSpPr>
-          <p:cNvPr id="7" name="プランナー・企画立案・システム／ルール設計。&#10;タスクの振り分け、画像・S">
+          <p:cNvPr id="5" name="プランナー・企画立案・システム／ルール設計。&#10;タスクの振り分け、画像・S">
             <a:extLst xmlns:a="http://schemas.openxmlformats.org/drawingml/2006/main">
               <a:ext uri="{FF2B5EF4-FFF2-40B4-BE49-F238E27FC236}">
-                <a16:creationId xmlns:a16="http://schemas.microsoft.com/office/drawing/2014/main" id="{4D28B909-C38F-4E89-8037-4BB7B9A6A259}"/>
+                <a16:creationId xmlns:a16="http://schemas.microsoft.com/office/drawing/2014/main" id="{1807354B-FDAA-4987-B8E1-A79E2E3E7C09}"/>
               </a:ext>
             </a:extLst>
           </p:cNvPr>
@@ -12817,10 +10873,10 @@
       </p:sp>
       <p:sp>
         <p:nvSpPr>
-          <p:cNvPr id="8" name="企画でまとめたこと">
+          <p:cNvPr id="6" name="企画でまとめたこと">
             <a:extLst xmlns:a="http://schemas.openxmlformats.org/drawingml/2006/main">
               <a:ext uri="{FF2B5EF4-FFF2-40B4-BE49-F238E27FC236}">
-                <a16:creationId xmlns:a16="http://schemas.microsoft.com/office/drawing/2014/main" id="{8D3AE199-712F-4C12-A760-657F596EAA29}"/>
+                <a16:creationId xmlns:a16="http://schemas.microsoft.com/office/drawing/2014/main" id="{83B9C27E-60A3-472B-881E-D9F1342EFE20}"/>
               </a:ext>
             </a:extLst>
           </p:cNvPr>
@@ -12979,10 +11035,10 @@
       </p:sp>
       <p:sp>
         <p:nvSpPr>
-          <p:cNvPr id="9" name="三方向へ送る仕分けと、不良品を返す判断を整理。&#10;プレイヤーが何を見て、ど">
+          <p:cNvPr id="7" name="三方向へ送る仕分けと、不良品を返す判断を整理。&#10;プレイヤーが何を見て、ど">
             <a:extLst xmlns:a="http://schemas.openxmlformats.org/drawingml/2006/main">
               <a:ext uri="{FF2B5EF4-FFF2-40B4-BE49-F238E27FC236}">
-                <a16:creationId xmlns:a16="http://schemas.microsoft.com/office/drawing/2014/main" id="{A362747F-037B-4CC4-9051-CD7997032FA0}"/>
+                <a16:creationId xmlns:a16="http://schemas.microsoft.com/office/drawing/2014/main" id="{67A77FCC-4739-4183-BE60-B21C1D7979C0}"/>
               </a:ext>
             </a:extLst>
           </p:cNvPr>
@@ -13195,10 +11251,10 @@
       </p:sp>
       <p:sp>
         <p:nvSpPr>
-          <p:cNvPr id="10" name="unityroomで「三色の分岐係」をプレイ">
+          <p:cNvPr id="8" name="unityroomで「三色の分岐係」をプレイ">
             <a:extLst xmlns:a="http://schemas.openxmlformats.org/drawingml/2006/main">
               <a:ext uri="{FF2B5EF4-FFF2-40B4-BE49-F238E27FC236}">
-                <a16:creationId xmlns:a16="http://schemas.microsoft.com/office/drawing/2014/main" id="{1D8692CC-12B8-47C9-AD41-44D0B0EE1849}"/>
+                <a16:creationId xmlns:a16="http://schemas.microsoft.com/office/drawing/2014/main" id="{89A7C892-0E36-493C-A226-9C10015C2ED6}"/>
               </a:ext>
             </a:extLst>
           </p:cNvPr>
@@ -13349,7 +11405,7 @@
                 <a:latin typeface="Meiryo"/>
                 <a:ea typeface="Meiryo"/>
                 <a:cs typeface="Meiryo"/>
-                <a:hlinkClick xmlns:r="http://schemas.openxmlformats.org/officeDocument/2006/relationships" r:id="R9cb5f202894e4f9b"/>
+                <a:hlinkClick xmlns:r="http://schemas.openxmlformats.org/officeDocument/2006/relationships" r:id="Raa6ac3b42b014ac0"/>
               </a:rPr>
               <a:t>unityroomで「三色の分岐係」をプレイ</a:t>
             </a:r>
@@ -13359,7 +11415,7 @@
     </p:spTree>
     <p:extLst>
       <p:ext uri="{BB962C8B-B14F-4D97-AF65-F5344CB8AC3E}">
-        <p14:creationId xmlns:p14="http://schemas.microsoft.com/office/powerpoint/2010/main" val="725639586"/>
+        <p14:creationId xmlns:p14="http://schemas.microsoft.com/office/powerpoint/2010/main" val="388644960"/>
       </p:ext>
     </p:extLst>
   </p:cSld>
